--- a/docs/pptx/entire/ritu-entire-linsubhr-ratio-anemia2.pptx
+++ b/docs/pptx/entire/ritu-entire-linsubhr-ratio-anemia2.pptx
@@ -2959,612 +2959,612 @@
           </p:nvSpPr>
           <p:spPr>
             <a:xfrm>
-              <a:off x="1172049" y="3063524"/>
-              <a:ext cx="7090630" cy="2239872"/>
+              <a:off x="1172049" y="3086446"/>
+              <a:ext cx="7090630" cy="2214417"/>
             </a:xfrm>
             <a:custGeom>
               <a:avLst/>
               <a:pathLst>
-                <a:path w="7090630" h="2239872">
+                <a:path w="7090630" h="2214417">
                   <a:moveTo>
                     <a:pt x="0" y="0"/>
                   </a:moveTo>
                   <a:lnTo>
-                    <a:pt x="71622" y="56892"/>
-                  </a:lnTo>
-                  <a:lnTo>
-                    <a:pt x="143245" y="112487"/>
-                  </a:lnTo>
-                  <a:lnTo>
-                    <a:pt x="214867" y="166813"/>
-                  </a:lnTo>
-                  <a:lnTo>
-                    <a:pt x="286490" y="219900"/>
-                  </a:lnTo>
-                  <a:lnTo>
-                    <a:pt x="358112" y="271776"/>
-                  </a:lnTo>
-                  <a:lnTo>
-                    <a:pt x="429735" y="322468"/>
-                  </a:lnTo>
-                  <a:lnTo>
-                    <a:pt x="501357" y="372003"/>
-                  </a:lnTo>
-                  <a:lnTo>
-                    <a:pt x="572980" y="420409"/>
-                  </a:lnTo>
-                  <a:lnTo>
-                    <a:pt x="644602" y="467710"/>
-                  </a:lnTo>
-                  <a:lnTo>
-                    <a:pt x="716225" y="513932"/>
-                  </a:lnTo>
-                  <a:lnTo>
-                    <a:pt x="787847" y="559100"/>
-                  </a:lnTo>
-                  <a:lnTo>
-                    <a:pt x="859470" y="603237"/>
-                  </a:lnTo>
-                  <a:lnTo>
-                    <a:pt x="931092" y="646367"/>
-                  </a:lnTo>
-                  <a:lnTo>
-                    <a:pt x="1002715" y="688513"/>
-                  </a:lnTo>
-                  <a:lnTo>
-                    <a:pt x="1074337" y="729698"/>
-                  </a:lnTo>
-                  <a:lnTo>
-                    <a:pt x="1145960" y="769943"/>
-                  </a:lnTo>
-                  <a:lnTo>
-                    <a:pt x="1217582" y="809270"/>
-                  </a:lnTo>
-                  <a:lnTo>
-                    <a:pt x="1289205" y="847700"/>
-                  </a:lnTo>
-                  <a:lnTo>
-                    <a:pt x="1360827" y="885252"/>
-                  </a:lnTo>
-                  <a:lnTo>
-                    <a:pt x="1432450" y="921949"/>
-                  </a:lnTo>
-                  <a:lnTo>
-                    <a:pt x="1504073" y="957808"/>
-                  </a:lnTo>
-                  <a:lnTo>
-                    <a:pt x="1575695" y="992849"/>
-                  </a:lnTo>
-                  <a:lnTo>
-                    <a:pt x="1647318" y="1027090"/>
-                  </a:lnTo>
-                  <a:lnTo>
-                    <a:pt x="1718940" y="1060550"/>
-                  </a:lnTo>
-                  <a:lnTo>
-                    <a:pt x="1790563" y="1093247"/>
-                  </a:lnTo>
-                  <a:lnTo>
-                    <a:pt x="1862185" y="1125198"/>
-                  </a:lnTo>
-                  <a:lnTo>
-                    <a:pt x="1933808" y="1156420"/>
-                  </a:lnTo>
-                  <a:lnTo>
-                    <a:pt x="2005430" y="1186930"/>
-                  </a:lnTo>
-                  <a:lnTo>
-                    <a:pt x="2077053" y="1216743"/>
-                  </a:lnTo>
-                  <a:lnTo>
-                    <a:pt x="2148675" y="1245877"/>
-                  </a:lnTo>
-                  <a:lnTo>
-                    <a:pt x="2220298" y="1274345"/>
-                  </a:lnTo>
-                  <a:lnTo>
-                    <a:pt x="2291920" y="1302165"/>
-                  </a:lnTo>
-                  <a:lnTo>
-                    <a:pt x="2363543" y="1329349"/>
-                  </a:lnTo>
-                  <a:lnTo>
-                    <a:pt x="2435165" y="1355914"/>
-                  </a:lnTo>
-                  <a:lnTo>
-                    <a:pt x="2506788" y="1381872"/>
-                  </a:lnTo>
-                  <a:lnTo>
-                    <a:pt x="2578410" y="1407238"/>
-                  </a:lnTo>
-                  <a:lnTo>
-                    <a:pt x="2650033" y="1432026"/>
-                  </a:lnTo>
-                  <a:lnTo>
-                    <a:pt x="2721655" y="1456248"/>
-                  </a:lnTo>
-                  <a:lnTo>
-                    <a:pt x="2793278" y="1479917"/>
-                  </a:lnTo>
-                  <a:lnTo>
-                    <a:pt x="2864901" y="1503046"/>
-                  </a:lnTo>
-                  <a:lnTo>
-                    <a:pt x="2936523" y="1525648"/>
-                  </a:lnTo>
-                  <a:lnTo>
-                    <a:pt x="3008146" y="1547734"/>
-                  </a:lnTo>
-                  <a:lnTo>
-                    <a:pt x="3079768" y="1569316"/>
-                  </a:lnTo>
-                  <a:lnTo>
-                    <a:pt x="3151391" y="1590406"/>
-                  </a:lnTo>
-                  <a:lnTo>
-                    <a:pt x="3223013" y="1611014"/>
-                  </a:lnTo>
-                  <a:lnTo>
-                    <a:pt x="3294636" y="1631153"/>
-                  </a:lnTo>
-                  <a:lnTo>
-                    <a:pt x="3366258" y="1650832"/>
-                  </a:lnTo>
-                  <a:lnTo>
-                    <a:pt x="3437881" y="1666963"/>
-                  </a:lnTo>
-                  <a:lnTo>
-                    <a:pt x="3509503" y="1675785"/>
-                  </a:lnTo>
-                  <a:lnTo>
-                    <a:pt x="3581126" y="1684514"/>
-                  </a:lnTo>
-                  <a:lnTo>
-                    <a:pt x="3652748" y="1693149"/>
-                  </a:lnTo>
-                  <a:lnTo>
-                    <a:pt x="3724371" y="1701692"/>
-                  </a:lnTo>
-                  <a:lnTo>
-                    <a:pt x="3795993" y="1710144"/>
-                  </a:lnTo>
-                  <a:lnTo>
-                    <a:pt x="3867616" y="1718506"/>
-                  </a:lnTo>
-                  <a:lnTo>
-                    <a:pt x="3939238" y="1726778"/>
-                  </a:lnTo>
-                  <a:lnTo>
-                    <a:pt x="4010861" y="1734962"/>
-                  </a:lnTo>
-                  <a:lnTo>
-                    <a:pt x="4082483" y="1743059"/>
-                  </a:lnTo>
-                  <a:lnTo>
-                    <a:pt x="4154106" y="1751070"/>
-                  </a:lnTo>
-                  <a:lnTo>
-                    <a:pt x="4225729" y="1758995"/>
-                  </a:lnTo>
-                  <a:lnTo>
-                    <a:pt x="4297351" y="1766835"/>
-                  </a:lnTo>
-                  <a:lnTo>
-                    <a:pt x="4368974" y="1774592"/>
-                  </a:lnTo>
-                  <a:lnTo>
-                    <a:pt x="4440596" y="1782266"/>
-                  </a:lnTo>
-                  <a:lnTo>
-                    <a:pt x="4512219" y="1789858"/>
-                  </a:lnTo>
-                  <a:lnTo>
-                    <a:pt x="4583841" y="1797369"/>
-                  </a:lnTo>
-                  <a:lnTo>
-                    <a:pt x="4655464" y="1804800"/>
-                  </a:lnTo>
-                  <a:lnTo>
-                    <a:pt x="4727086" y="1812152"/>
-                  </a:lnTo>
-                  <a:lnTo>
-                    <a:pt x="4798709" y="1819425"/>
-                  </a:lnTo>
-                  <a:lnTo>
-                    <a:pt x="4870331" y="1826621"/>
-                  </a:lnTo>
-                  <a:lnTo>
-                    <a:pt x="4941954" y="1833739"/>
-                  </a:lnTo>
-                  <a:lnTo>
-                    <a:pt x="5013576" y="1840782"/>
-                  </a:lnTo>
-                  <a:lnTo>
-                    <a:pt x="5085199" y="1847750"/>
-                  </a:lnTo>
-                  <a:lnTo>
-                    <a:pt x="5156821" y="1854643"/>
-                  </a:lnTo>
-                  <a:lnTo>
-                    <a:pt x="5228444" y="1861463"/>
-                  </a:lnTo>
-                  <a:lnTo>
-                    <a:pt x="5300066" y="1868210"/>
-                  </a:lnTo>
-                  <a:lnTo>
-                    <a:pt x="5371689" y="1874885"/>
-                  </a:lnTo>
-                  <a:lnTo>
-                    <a:pt x="5443311" y="1881489"/>
-                  </a:lnTo>
-                  <a:lnTo>
-                    <a:pt x="5514934" y="1888022"/>
-                  </a:lnTo>
-                  <a:lnTo>
-                    <a:pt x="5586557" y="1894486"/>
-                  </a:lnTo>
-                  <a:lnTo>
-                    <a:pt x="5658179" y="1900880"/>
-                  </a:lnTo>
-                  <a:lnTo>
-                    <a:pt x="5729802" y="1907206"/>
-                  </a:lnTo>
-                  <a:lnTo>
-                    <a:pt x="5801424" y="1913465"/>
-                  </a:lnTo>
-                  <a:lnTo>
-                    <a:pt x="5873047" y="1919657"/>
-                  </a:lnTo>
-                  <a:lnTo>
-                    <a:pt x="5944669" y="1925783"/>
-                  </a:lnTo>
-                  <a:lnTo>
-                    <a:pt x="6016292" y="1931844"/>
-                  </a:lnTo>
-                  <a:lnTo>
-                    <a:pt x="6087914" y="1937840"/>
-                  </a:lnTo>
-                  <a:lnTo>
-                    <a:pt x="6159537" y="1943772"/>
-                  </a:lnTo>
-                  <a:lnTo>
-                    <a:pt x="6231159" y="1949641"/>
-                  </a:lnTo>
-                  <a:lnTo>
-                    <a:pt x="6302782" y="1955447"/>
-                  </a:lnTo>
-                  <a:lnTo>
-                    <a:pt x="6374404" y="1961191"/>
-                  </a:lnTo>
-                  <a:lnTo>
-                    <a:pt x="6446027" y="1966873"/>
-                  </a:lnTo>
-                  <a:lnTo>
-                    <a:pt x="6517649" y="1972496"/>
-                  </a:lnTo>
-                  <a:lnTo>
-                    <a:pt x="6589272" y="1978058"/>
-                  </a:lnTo>
-                  <a:lnTo>
-                    <a:pt x="6660894" y="1983560"/>
-                  </a:lnTo>
-                  <a:lnTo>
-                    <a:pt x="6732517" y="1989004"/>
-                  </a:lnTo>
-                  <a:lnTo>
-                    <a:pt x="6804139" y="1994390"/>
-                  </a:lnTo>
-                  <a:lnTo>
-                    <a:pt x="6875762" y="1999719"/>
-                  </a:lnTo>
-                  <a:lnTo>
-                    <a:pt x="6947385" y="2004991"/>
-                  </a:lnTo>
-                  <a:lnTo>
-                    <a:pt x="7019007" y="2010206"/>
-                  </a:lnTo>
-                  <a:lnTo>
-                    <a:pt x="7090630" y="2015366"/>
-                  </a:lnTo>
-                  <a:lnTo>
-                    <a:pt x="7090630" y="2239872"/>
-                  </a:lnTo>
-                  <a:lnTo>
-                    <a:pt x="7019007" y="2233945"/>
-                  </a:lnTo>
-                  <a:lnTo>
-                    <a:pt x="6947385" y="2227880"/>
-                  </a:lnTo>
-                  <a:lnTo>
-                    <a:pt x="6875762" y="2221674"/>
-                  </a:lnTo>
-                  <a:lnTo>
-                    <a:pt x="6804139" y="2215322"/>
-                  </a:lnTo>
-                  <a:lnTo>
-                    <a:pt x="6732517" y="2208822"/>
-                  </a:lnTo>
-                  <a:lnTo>
-                    <a:pt x="6660894" y="2202171"/>
-                  </a:lnTo>
-                  <a:lnTo>
-                    <a:pt x="6589272" y="2195364"/>
-                  </a:lnTo>
-                  <a:lnTo>
-                    <a:pt x="6517649" y="2188398"/>
-                  </a:lnTo>
-                  <a:lnTo>
-                    <a:pt x="6446027" y="2181269"/>
-                  </a:lnTo>
-                  <a:lnTo>
-                    <a:pt x="6374404" y="2173974"/>
-                  </a:lnTo>
-                  <a:lnTo>
-                    <a:pt x="6302782" y="2166509"/>
-                  </a:lnTo>
-                  <a:lnTo>
-                    <a:pt x="6231159" y="2158870"/>
-                  </a:lnTo>
-                  <a:lnTo>
-                    <a:pt x="6159537" y="2151052"/>
-                  </a:lnTo>
-                  <a:lnTo>
-                    <a:pt x="6087914" y="2143052"/>
-                  </a:lnTo>
-                  <a:lnTo>
-                    <a:pt x="6016292" y="2134864"/>
-                  </a:lnTo>
-                  <a:lnTo>
-                    <a:pt x="5944669" y="2126486"/>
-                  </a:lnTo>
-                  <a:lnTo>
-                    <a:pt x="5873047" y="2117912"/>
-                  </a:lnTo>
-                  <a:lnTo>
-                    <a:pt x="5801424" y="2109138"/>
-                  </a:lnTo>
-                  <a:lnTo>
-                    <a:pt x="5729802" y="2100159"/>
-                  </a:lnTo>
-                  <a:lnTo>
-                    <a:pt x="5658179" y="2090971"/>
-                  </a:lnTo>
-                  <a:lnTo>
-                    <a:pt x="5586557" y="2081568"/>
-                  </a:lnTo>
-                  <a:lnTo>
-                    <a:pt x="5514934" y="2071945"/>
-                  </a:lnTo>
-                  <a:lnTo>
-                    <a:pt x="5443311" y="2062098"/>
-                  </a:lnTo>
-                  <a:lnTo>
-                    <a:pt x="5371689" y="2052021"/>
-                  </a:lnTo>
-                  <a:lnTo>
-                    <a:pt x="5300066" y="2041708"/>
-                  </a:lnTo>
-                  <a:lnTo>
-                    <a:pt x="5228444" y="2031155"/>
-                  </a:lnTo>
-                  <a:lnTo>
-                    <a:pt x="5156821" y="2020355"/>
-                  </a:lnTo>
-                  <a:lnTo>
-                    <a:pt x="5085199" y="2009304"/>
-                  </a:lnTo>
-                  <a:lnTo>
-                    <a:pt x="5013576" y="1997994"/>
-                  </a:lnTo>
-                  <a:lnTo>
-                    <a:pt x="4941954" y="1986420"/>
-                  </a:lnTo>
-                  <a:lnTo>
-                    <a:pt x="4870331" y="1974576"/>
-                  </a:lnTo>
-                  <a:lnTo>
-                    <a:pt x="4798709" y="1962456"/>
-                  </a:lnTo>
-                  <a:lnTo>
-                    <a:pt x="4727086" y="1950052"/>
-                  </a:lnTo>
-                  <a:lnTo>
-                    <a:pt x="4655464" y="1937359"/>
-                  </a:lnTo>
-                  <a:lnTo>
-                    <a:pt x="4583841" y="1924370"/>
-                  </a:lnTo>
-                  <a:lnTo>
-                    <a:pt x="4512219" y="1911077"/>
-                  </a:lnTo>
-                  <a:lnTo>
-                    <a:pt x="4440596" y="1897474"/>
-                  </a:lnTo>
-                  <a:lnTo>
-                    <a:pt x="4368974" y="1883553"/>
-                  </a:lnTo>
-                  <a:lnTo>
-                    <a:pt x="4297351" y="1869308"/>
-                  </a:lnTo>
-                  <a:lnTo>
-                    <a:pt x="4225729" y="1854729"/>
-                  </a:lnTo>
-                  <a:lnTo>
-                    <a:pt x="4154106" y="1839811"/>
-                  </a:lnTo>
-                  <a:lnTo>
-                    <a:pt x="4082483" y="1824544"/>
-                  </a:lnTo>
-                  <a:lnTo>
-                    <a:pt x="4010861" y="1808921"/>
-                  </a:lnTo>
-                  <a:lnTo>
-                    <a:pt x="3939238" y="1792932"/>
-                  </a:lnTo>
-                  <a:lnTo>
-                    <a:pt x="3867616" y="1776571"/>
-                  </a:lnTo>
-                  <a:lnTo>
-                    <a:pt x="3795993" y="1759828"/>
-                  </a:lnTo>
-                  <a:lnTo>
-                    <a:pt x="3724371" y="1742693"/>
-                  </a:lnTo>
-                  <a:lnTo>
-                    <a:pt x="3652748" y="1725159"/>
-                  </a:lnTo>
-                  <a:lnTo>
-                    <a:pt x="3581126" y="1707216"/>
-                  </a:lnTo>
-                  <a:lnTo>
-                    <a:pt x="3509503" y="1688853"/>
-                  </a:lnTo>
-                  <a:lnTo>
-                    <a:pt x="3437881" y="1670062"/>
-                  </a:lnTo>
-                  <a:lnTo>
-                    <a:pt x="3366258" y="1658045"/>
-                  </a:lnTo>
-                  <a:lnTo>
-                    <a:pt x="3294636" y="1649031"/>
-                  </a:lnTo>
-                  <a:lnTo>
-                    <a:pt x="3223013" y="1639920"/>
-                  </a:lnTo>
-                  <a:lnTo>
-                    <a:pt x="3151391" y="1630711"/>
-                  </a:lnTo>
-                  <a:lnTo>
-                    <a:pt x="3079768" y="1621402"/>
-                  </a:lnTo>
-                  <a:lnTo>
-                    <a:pt x="3008146" y="1611993"/>
-                  </a:lnTo>
-                  <a:lnTo>
-                    <a:pt x="2936523" y="1602482"/>
-                  </a:lnTo>
-                  <a:lnTo>
-                    <a:pt x="2864901" y="1592869"/>
-                  </a:lnTo>
-                  <a:lnTo>
-                    <a:pt x="2793278" y="1583152"/>
-                  </a:lnTo>
-                  <a:lnTo>
-                    <a:pt x="2721655" y="1573330"/>
-                  </a:lnTo>
-                  <a:lnTo>
-                    <a:pt x="2650033" y="1563403"/>
-                  </a:lnTo>
-                  <a:lnTo>
-                    <a:pt x="2578410" y="1553368"/>
-                  </a:lnTo>
-                  <a:lnTo>
-                    <a:pt x="2506788" y="1543225"/>
-                  </a:lnTo>
-                  <a:lnTo>
-                    <a:pt x="2435165" y="1532973"/>
-                  </a:lnTo>
-                  <a:lnTo>
-                    <a:pt x="2363543" y="1522610"/>
-                  </a:lnTo>
-                  <a:lnTo>
-                    <a:pt x="2291920" y="1512135"/>
-                  </a:lnTo>
-                  <a:lnTo>
-                    <a:pt x="2220298" y="1501547"/>
-                  </a:lnTo>
-                  <a:lnTo>
-                    <a:pt x="2148675" y="1490845"/>
-                  </a:lnTo>
-                  <a:lnTo>
-                    <a:pt x="2077053" y="1480028"/>
-                  </a:lnTo>
-                  <a:lnTo>
-                    <a:pt x="2005430" y="1469094"/>
-                  </a:lnTo>
-                  <a:lnTo>
-                    <a:pt x="1933808" y="1458042"/>
-                  </a:lnTo>
-                  <a:lnTo>
-                    <a:pt x="1862185" y="1446871"/>
-                  </a:lnTo>
-                  <a:lnTo>
-                    <a:pt x="1790563" y="1435579"/>
-                  </a:lnTo>
-                  <a:lnTo>
-                    <a:pt x="1718940" y="1424166"/>
-                  </a:lnTo>
-                  <a:lnTo>
-                    <a:pt x="1647318" y="1412629"/>
-                  </a:lnTo>
-                  <a:lnTo>
-                    <a:pt x="1575695" y="1400968"/>
-                  </a:lnTo>
-                  <a:lnTo>
-                    <a:pt x="1504073" y="1389181"/>
-                  </a:lnTo>
-                  <a:lnTo>
-                    <a:pt x="1432450" y="1377267"/>
-                  </a:lnTo>
-                  <a:lnTo>
-                    <a:pt x="1360827" y="1365225"/>
-                  </a:lnTo>
-                  <a:lnTo>
-                    <a:pt x="1289205" y="1353053"/>
-                  </a:lnTo>
-                  <a:lnTo>
-                    <a:pt x="1217582" y="1340749"/>
-                  </a:lnTo>
-                  <a:lnTo>
-                    <a:pt x="1145960" y="1328313"/>
-                  </a:lnTo>
-                  <a:lnTo>
-                    <a:pt x="1074337" y="1315742"/>
-                  </a:lnTo>
-                  <a:lnTo>
-                    <a:pt x="1002715" y="1303036"/>
-                  </a:lnTo>
-                  <a:lnTo>
-                    <a:pt x="931092" y="1290193"/>
-                  </a:lnTo>
-                  <a:lnTo>
-                    <a:pt x="859470" y="1277211"/>
-                  </a:lnTo>
-                  <a:lnTo>
-                    <a:pt x="787847" y="1264090"/>
-                  </a:lnTo>
-                  <a:lnTo>
-                    <a:pt x="716225" y="1250826"/>
-                  </a:lnTo>
-                  <a:lnTo>
-                    <a:pt x="644602" y="1237420"/>
-                  </a:lnTo>
-                  <a:lnTo>
-                    <a:pt x="572980" y="1223869"/>
-                  </a:lnTo>
-                  <a:lnTo>
-                    <a:pt x="501357" y="1210172"/>
-                  </a:lnTo>
-                  <a:lnTo>
-                    <a:pt x="429735" y="1196327"/>
-                  </a:lnTo>
-                  <a:lnTo>
-                    <a:pt x="358112" y="1182333"/>
-                  </a:lnTo>
-                  <a:lnTo>
-                    <a:pt x="286490" y="1168188"/>
-                  </a:lnTo>
-                  <a:lnTo>
-                    <a:pt x="214867" y="1153891"/>
-                  </a:lnTo>
-                  <a:lnTo>
-                    <a:pt x="143245" y="1139439"/>
-                  </a:lnTo>
-                  <a:lnTo>
-                    <a:pt x="71622" y="1124831"/>
-                  </a:lnTo>
-                  <a:lnTo>
-                    <a:pt x="0" y="1110066"/>
+                    <a:pt x="71622" y="55902"/>
+                  </a:lnTo>
+                  <a:lnTo>
+                    <a:pt x="143245" y="110539"/>
+                  </a:lnTo>
+                  <a:lnTo>
+                    <a:pt x="214867" y="163940"/>
+                  </a:lnTo>
+                  <a:lnTo>
+                    <a:pt x="286490" y="216133"/>
+                  </a:lnTo>
+                  <a:lnTo>
+                    <a:pt x="358112" y="267145"/>
+                  </a:lnTo>
+                  <a:lnTo>
+                    <a:pt x="429735" y="317003"/>
+                  </a:lnTo>
+                  <a:lnTo>
+                    <a:pt x="501357" y="365733"/>
+                  </a:lnTo>
+                  <a:lnTo>
+                    <a:pt x="572980" y="413361"/>
+                  </a:lnTo>
+                  <a:lnTo>
+                    <a:pt x="644602" y="459911"/>
+                  </a:lnTo>
+                  <a:lnTo>
+                    <a:pt x="716225" y="505407"/>
+                  </a:lnTo>
+                  <a:lnTo>
+                    <a:pt x="787847" y="549874"/>
+                  </a:lnTo>
+                  <a:lnTo>
+                    <a:pt x="859470" y="593336"/>
+                  </a:lnTo>
+                  <a:lnTo>
+                    <a:pt x="931092" y="635813"/>
+                  </a:lnTo>
+                  <a:lnTo>
+                    <a:pt x="1002715" y="677330"/>
+                  </a:lnTo>
+                  <a:lnTo>
+                    <a:pt x="1074337" y="717908"/>
+                  </a:lnTo>
+                  <a:lnTo>
+                    <a:pt x="1145960" y="757567"/>
+                  </a:lnTo>
+                  <a:lnTo>
+                    <a:pt x="1217582" y="796329"/>
+                  </a:lnTo>
+                  <a:lnTo>
+                    <a:pt x="1289205" y="834214"/>
+                  </a:lnTo>
+                  <a:lnTo>
+                    <a:pt x="1360827" y="871242"/>
+                  </a:lnTo>
+                  <a:lnTo>
+                    <a:pt x="1432450" y="907433"/>
+                  </a:lnTo>
+                  <a:lnTo>
+                    <a:pt x="1504073" y="942804"/>
+                  </a:lnTo>
+                  <a:lnTo>
+                    <a:pt x="1575695" y="977375"/>
+                  </a:lnTo>
+                  <a:lnTo>
+                    <a:pt x="1647318" y="1011164"/>
+                  </a:lnTo>
+                  <a:lnTo>
+                    <a:pt x="1718940" y="1044189"/>
+                  </a:lnTo>
+                  <a:lnTo>
+                    <a:pt x="1790563" y="1076466"/>
+                  </a:lnTo>
+                  <a:lnTo>
+                    <a:pt x="1862185" y="1108013"/>
+                  </a:lnTo>
+                  <a:lnTo>
+                    <a:pt x="1933808" y="1138846"/>
+                  </a:lnTo>
+                  <a:lnTo>
+                    <a:pt x="2005430" y="1168982"/>
+                  </a:lnTo>
+                  <a:lnTo>
+                    <a:pt x="2077053" y="1198436"/>
+                  </a:lnTo>
+                  <a:lnTo>
+                    <a:pt x="2148675" y="1227223"/>
+                  </a:lnTo>
+                  <a:lnTo>
+                    <a:pt x="2220298" y="1255359"/>
+                  </a:lnTo>
+                  <a:lnTo>
+                    <a:pt x="2291920" y="1282859"/>
+                  </a:lnTo>
+                  <a:lnTo>
+                    <a:pt x="2363543" y="1309736"/>
+                  </a:lnTo>
+                  <a:lnTo>
+                    <a:pt x="2435165" y="1336005"/>
+                  </a:lnTo>
+                  <a:lnTo>
+                    <a:pt x="2506788" y="1361680"/>
+                  </a:lnTo>
+                  <a:lnTo>
+                    <a:pt x="2578410" y="1386774"/>
+                  </a:lnTo>
+                  <a:lnTo>
+                    <a:pt x="2650033" y="1411301"/>
+                  </a:lnTo>
+                  <a:lnTo>
+                    <a:pt x="2721655" y="1435272"/>
+                  </a:lnTo>
+                  <a:lnTo>
+                    <a:pt x="2793278" y="1458701"/>
+                  </a:lnTo>
+                  <a:lnTo>
+                    <a:pt x="2864901" y="1481600"/>
+                  </a:lnTo>
+                  <a:lnTo>
+                    <a:pt x="2936523" y="1503981"/>
+                  </a:lnTo>
+                  <a:lnTo>
+                    <a:pt x="3008146" y="1525855"/>
+                  </a:lnTo>
+                  <a:lnTo>
+                    <a:pt x="3079768" y="1547235"/>
+                  </a:lnTo>
+                  <a:lnTo>
+                    <a:pt x="3151391" y="1568130"/>
+                  </a:lnTo>
+                  <a:lnTo>
+                    <a:pt x="3223013" y="1588554"/>
+                  </a:lnTo>
+                  <a:lnTo>
+                    <a:pt x="3294636" y="1608515"/>
+                  </a:lnTo>
+                  <a:lnTo>
+                    <a:pt x="3366258" y="1628024"/>
+                  </a:lnTo>
+                  <a:lnTo>
+                    <a:pt x="3437881" y="1643997"/>
+                  </a:lnTo>
+                  <a:lnTo>
+                    <a:pt x="3509503" y="1652675"/>
+                  </a:lnTo>
+                  <a:lnTo>
+                    <a:pt x="3581126" y="1661262"/>
+                  </a:lnTo>
+                  <a:lnTo>
+                    <a:pt x="3652748" y="1669759"/>
+                  </a:lnTo>
+                  <a:lnTo>
+                    <a:pt x="3724371" y="1678167"/>
+                  </a:lnTo>
+                  <a:lnTo>
+                    <a:pt x="3795993" y="1686486"/>
+                  </a:lnTo>
+                  <a:lnTo>
+                    <a:pt x="3867616" y="1694718"/>
+                  </a:lnTo>
+                  <a:lnTo>
+                    <a:pt x="3939238" y="1702864"/>
+                  </a:lnTo>
+                  <a:lnTo>
+                    <a:pt x="4010861" y="1710924"/>
+                  </a:lnTo>
+                  <a:lnTo>
+                    <a:pt x="4082483" y="1718900"/>
+                  </a:lnTo>
+                  <a:lnTo>
+                    <a:pt x="4154106" y="1726792"/>
+                  </a:lnTo>
+                  <a:lnTo>
+                    <a:pt x="4225729" y="1734601"/>
+                  </a:lnTo>
+                  <a:lnTo>
+                    <a:pt x="4297351" y="1742328"/>
+                  </a:lnTo>
+                  <a:lnTo>
+                    <a:pt x="4368974" y="1749974"/>
+                  </a:lnTo>
+                  <a:lnTo>
+                    <a:pt x="4440596" y="1757540"/>
+                  </a:lnTo>
+                  <a:lnTo>
+                    <a:pt x="4512219" y="1765026"/>
+                  </a:lnTo>
+                  <a:lnTo>
+                    <a:pt x="4583841" y="1772434"/>
+                  </a:lnTo>
+                  <a:lnTo>
+                    <a:pt x="4655464" y="1779764"/>
+                  </a:lnTo>
+                  <a:lnTo>
+                    <a:pt x="4727086" y="1787017"/>
+                  </a:lnTo>
+                  <a:lnTo>
+                    <a:pt x="4798709" y="1794194"/>
+                  </a:lnTo>
+                  <a:lnTo>
+                    <a:pt x="4870331" y="1801296"/>
+                  </a:lnTo>
+                  <a:lnTo>
+                    <a:pt x="4941954" y="1808323"/>
+                  </a:lnTo>
+                  <a:lnTo>
+                    <a:pt x="5013576" y="1815276"/>
+                  </a:lnTo>
+                  <a:lnTo>
+                    <a:pt x="5085199" y="1822157"/>
+                  </a:lnTo>
+                  <a:lnTo>
+                    <a:pt x="5156821" y="1828965"/>
+                  </a:lnTo>
+                  <a:lnTo>
+                    <a:pt x="5228444" y="1835701"/>
+                  </a:lnTo>
+                  <a:lnTo>
+                    <a:pt x="5300066" y="1842367"/>
+                  </a:lnTo>
+                  <a:lnTo>
+                    <a:pt x="5371689" y="1848963"/>
+                  </a:lnTo>
+                  <a:lnTo>
+                    <a:pt x="5443311" y="1855490"/>
+                  </a:lnTo>
+                  <a:lnTo>
+                    <a:pt x="5514934" y="1861949"/>
+                  </a:lnTo>
+                  <a:lnTo>
+                    <a:pt x="5586557" y="1868339"/>
+                  </a:lnTo>
+                  <a:lnTo>
+                    <a:pt x="5658179" y="1874662"/>
+                  </a:lnTo>
+                  <a:lnTo>
+                    <a:pt x="5729802" y="1880920"/>
+                  </a:lnTo>
+                  <a:lnTo>
+                    <a:pt x="5801424" y="1887111"/>
+                  </a:lnTo>
+                  <a:lnTo>
+                    <a:pt x="5873047" y="1893237"/>
+                  </a:lnTo>
+                  <a:lnTo>
+                    <a:pt x="5944669" y="1899299"/>
+                  </a:lnTo>
+                  <a:lnTo>
+                    <a:pt x="6016292" y="1905298"/>
+                  </a:lnTo>
+                  <a:lnTo>
+                    <a:pt x="6087914" y="1911233"/>
+                  </a:lnTo>
+                  <a:lnTo>
+                    <a:pt x="6159537" y="1917107"/>
+                  </a:lnTo>
+                  <a:lnTo>
+                    <a:pt x="6231159" y="1922918"/>
+                  </a:lnTo>
+                  <a:lnTo>
+                    <a:pt x="6302782" y="1928669"/>
+                  </a:lnTo>
+                  <a:lnTo>
+                    <a:pt x="6374404" y="1934359"/>
+                  </a:lnTo>
+                  <a:lnTo>
+                    <a:pt x="6446027" y="1939989"/>
+                  </a:lnTo>
+                  <a:lnTo>
+                    <a:pt x="6517649" y="1945561"/>
+                  </a:lnTo>
+                  <a:lnTo>
+                    <a:pt x="6589272" y="1951074"/>
+                  </a:lnTo>
+                  <a:lnTo>
+                    <a:pt x="6660894" y="1956529"/>
+                  </a:lnTo>
+                  <a:lnTo>
+                    <a:pt x="6732517" y="1961927"/>
+                  </a:lnTo>
+                  <a:lnTo>
+                    <a:pt x="6804139" y="1967268"/>
+                  </a:lnTo>
+                  <a:lnTo>
+                    <a:pt x="6875762" y="1972553"/>
+                  </a:lnTo>
+                  <a:lnTo>
+                    <a:pt x="6947385" y="1977782"/>
+                  </a:lnTo>
+                  <a:lnTo>
+                    <a:pt x="7019007" y="1982957"/>
+                  </a:lnTo>
+                  <a:lnTo>
+                    <a:pt x="7090630" y="1988078"/>
+                  </a:lnTo>
+                  <a:lnTo>
+                    <a:pt x="7090630" y="2214417"/>
+                  </a:lnTo>
+                  <a:lnTo>
+                    <a:pt x="7019007" y="2208482"/>
+                  </a:lnTo>
+                  <a:lnTo>
+                    <a:pt x="6947385" y="2202409"/>
+                  </a:lnTo>
+                  <a:lnTo>
+                    <a:pt x="6875762" y="2196196"/>
+                  </a:lnTo>
+                  <a:lnTo>
+                    <a:pt x="6804139" y="2189839"/>
+                  </a:lnTo>
+                  <a:lnTo>
+                    <a:pt x="6732517" y="2183335"/>
+                  </a:lnTo>
+                  <a:lnTo>
+                    <a:pt x="6660894" y="2176681"/>
+                  </a:lnTo>
+                  <a:lnTo>
+                    <a:pt x="6589272" y="2169872"/>
+                  </a:lnTo>
+                  <a:lnTo>
+                    <a:pt x="6517649" y="2162906"/>
+                  </a:lnTo>
+                  <a:lnTo>
+                    <a:pt x="6446027" y="2155778"/>
+                  </a:lnTo>
+                  <a:lnTo>
+                    <a:pt x="6374404" y="2148486"/>
+                  </a:lnTo>
+                  <a:lnTo>
+                    <a:pt x="6302782" y="2141025"/>
+                  </a:lnTo>
+                  <a:lnTo>
+                    <a:pt x="6231159" y="2133391"/>
+                  </a:lnTo>
+                  <a:lnTo>
+                    <a:pt x="6159537" y="2125580"/>
+                  </a:lnTo>
+                  <a:lnTo>
+                    <a:pt x="6087914" y="2117588"/>
+                  </a:lnTo>
+                  <a:lnTo>
+                    <a:pt x="6016292" y="2109412"/>
+                  </a:lnTo>
+                  <a:lnTo>
+                    <a:pt x="5944669" y="2101046"/>
+                  </a:lnTo>
+                  <a:lnTo>
+                    <a:pt x="5873047" y="2092487"/>
+                  </a:lnTo>
+                  <a:lnTo>
+                    <a:pt x="5801424" y="2083729"/>
+                  </a:lnTo>
+                  <a:lnTo>
+                    <a:pt x="5729802" y="2074769"/>
+                  </a:lnTo>
+                  <a:lnTo>
+                    <a:pt x="5658179" y="2065601"/>
+                  </a:lnTo>
+                  <a:lnTo>
+                    <a:pt x="5586557" y="2056221"/>
+                  </a:lnTo>
+                  <a:lnTo>
+                    <a:pt x="5514934" y="2046624"/>
+                  </a:lnTo>
+                  <a:lnTo>
+                    <a:pt x="5443311" y="2036805"/>
+                  </a:lnTo>
+                  <a:lnTo>
+                    <a:pt x="5371689" y="2026758"/>
+                  </a:lnTo>
+                  <a:lnTo>
+                    <a:pt x="5300066" y="2016479"/>
+                  </a:lnTo>
+                  <a:lnTo>
+                    <a:pt x="5228444" y="2005962"/>
+                  </a:lnTo>
+                  <a:lnTo>
+                    <a:pt x="5156821" y="1995201"/>
+                  </a:lnTo>
+                  <a:lnTo>
+                    <a:pt x="5085199" y="1984192"/>
+                  </a:lnTo>
+                  <a:lnTo>
+                    <a:pt x="5013576" y="1972927"/>
+                  </a:lnTo>
+                  <a:lnTo>
+                    <a:pt x="4941954" y="1961402"/>
+                  </a:lnTo>
+                  <a:lnTo>
+                    <a:pt x="4870331" y="1949610"/>
+                  </a:lnTo>
+                  <a:lnTo>
+                    <a:pt x="4798709" y="1937545"/>
+                  </a:lnTo>
+                  <a:lnTo>
+                    <a:pt x="4727086" y="1925201"/>
+                  </a:lnTo>
+                  <a:lnTo>
+                    <a:pt x="4655464" y="1912571"/>
+                  </a:lnTo>
+                  <a:lnTo>
+                    <a:pt x="4583841" y="1899648"/>
+                  </a:lnTo>
+                  <a:lnTo>
+                    <a:pt x="4512219" y="1886427"/>
+                  </a:lnTo>
+                  <a:lnTo>
+                    <a:pt x="4440596" y="1872899"/>
+                  </a:lnTo>
+                  <a:lnTo>
+                    <a:pt x="4368974" y="1859058"/>
+                  </a:lnTo>
+                  <a:lnTo>
+                    <a:pt x="4297351" y="1844897"/>
+                  </a:lnTo>
+                  <a:lnTo>
+                    <a:pt x="4225729" y="1830408"/>
+                  </a:lnTo>
+                  <a:lnTo>
+                    <a:pt x="4154106" y="1815584"/>
+                  </a:lnTo>
+                  <a:lnTo>
+                    <a:pt x="4082483" y="1800416"/>
+                  </a:lnTo>
+                  <a:lnTo>
+                    <a:pt x="4010861" y="1784897"/>
+                  </a:lnTo>
+                  <a:lnTo>
+                    <a:pt x="3939238" y="1769019"/>
+                  </a:lnTo>
+                  <a:lnTo>
+                    <a:pt x="3867616" y="1752774"/>
+                  </a:lnTo>
+                  <a:lnTo>
+                    <a:pt x="3795993" y="1736152"/>
+                  </a:lnTo>
+                  <a:lnTo>
+                    <a:pt x="3724371" y="1719146"/>
+                  </a:lnTo>
+                  <a:lnTo>
+                    <a:pt x="3652748" y="1701746"/>
+                  </a:lnTo>
+                  <a:lnTo>
+                    <a:pt x="3581126" y="1683943"/>
+                  </a:lnTo>
+                  <a:lnTo>
+                    <a:pt x="3509503" y="1665728"/>
+                  </a:lnTo>
+                  <a:lnTo>
+                    <a:pt x="3437881" y="1647092"/>
+                  </a:lnTo>
+                  <a:lnTo>
+                    <a:pt x="3366258" y="1635227"/>
+                  </a:lnTo>
+                  <a:lnTo>
+                    <a:pt x="3294636" y="1626363"/>
+                  </a:lnTo>
+                  <a:lnTo>
+                    <a:pt x="3223013" y="1617406"/>
+                  </a:lnTo>
+                  <a:lnTo>
+                    <a:pt x="3151391" y="1608354"/>
+                  </a:lnTo>
+                  <a:lnTo>
+                    <a:pt x="3079768" y="1599206"/>
+                  </a:lnTo>
+                  <a:lnTo>
+                    <a:pt x="3008146" y="1589961"/>
+                  </a:lnTo>
+                  <a:lnTo>
+                    <a:pt x="2936523" y="1580617"/>
+                  </a:lnTo>
+                  <a:lnTo>
+                    <a:pt x="2864901" y="1571175"/>
+                  </a:lnTo>
+                  <a:lnTo>
+                    <a:pt x="2793278" y="1561632"/>
+                  </a:lnTo>
+                  <a:lnTo>
+                    <a:pt x="2721655" y="1551988"/>
+                  </a:lnTo>
+                  <a:lnTo>
+                    <a:pt x="2650033" y="1542242"/>
+                  </a:lnTo>
+                  <a:lnTo>
+                    <a:pt x="2578410" y="1532393"/>
+                  </a:lnTo>
+                  <a:lnTo>
+                    <a:pt x="2506788" y="1522439"/>
+                  </a:lnTo>
+                  <a:lnTo>
+                    <a:pt x="2435165" y="1512379"/>
+                  </a:lnTo>
+                  <a:lnTo>
+                    <a:pt x="2363543" y="1502213"/>
+                  </a:lnTo>
+                  <a:lnTo>
+                    <a:pt x="2291920" y="1491939"/>
+                  </a:lnTo>
+                  <a:lnTo>
+                    <a:pt x="2220298" y="1481556"/>
+                  </a:lnTo>
+                  <a:lnTo>
+                    <a:pt x="2148675" y="1471062"/>
+                  </a:lnTo>
+                  <a:lnTo>
+                    <a:pt x="2077053" y="1460458"/>
+                  </a:lnTo>
+                  <a:lnTo>
+                    <a:pt x="2005430" y="1449741"/>
+                  </a:lnTo>
+                  <a:lnTo>
+                    <a:pt x="1933808" y="1438910"/>
+                  </a:lnTo>
+                  <a:lnTo>
+                    <a:pt x="1862185" y="1427965"/>
+                  </a:lnTo>
+                  <a:lnTo>
+                    <a:pt x="1790563" y="1416903"/>
+                  </a:lnTo>
+                  <a:lnTo>
+                    <a:pt x="1718940" y="1405724"/>
+                  </a:lnTo>
+                  <a:lnTo>
+                    <a:pt x="1647318" y="1394426"/>
+                  </a:lnTo>
+                  <a:lnTo>
+                    <a:pt x="1575695" y="1383009"/>
+                  </a:lnTo>
+                  <a:lnTo>
+                    <a:pt x="1504073" y="1371470"/>
+                  </a:lnTo>
+                  <a:lnTo>
+                    <a:pt x="1432450" y="1359810"/>
+                  </a:lnTo>
+                  <a:lnTo>
+                    <a:pt x="1360827" y="1348025"/>
+                  </a:lnTo>
+                  <a:lnTo>
+                    <a:pt x="1289205" y="1336115"/>
+                  </a:lnTo>
+                  <a:lnTo>
+                    <a:pt x="1217582" y="1324079"/>
+                  </a:lnTo>
+                  <a:lnTo>
+                    <a:pt x="1145960" y="1311916"/>
+                  </a:lnTo>
+                  <a:lnTo>
+                    <a:pt x="1074337" y="1299623"/>
+                  </a:lnTo>
+                  <a:lnTo>
+                    <a:pt x="1002715" y="1287200"/>
+                  </a:lnTo>
+                  <a:lnTo>
+                    <a:pt x="931092" y="1274645"/>
+                  </a:lnTo>
+                  <a:lnTo>
+                    <a:pt x="859470" y="1261957"/>
+                  </a:lnTo>
+                  <a:lnTo>
+                    <a:pt x="787847" y="1249135"/>
+                  </a:lnTo>
+                  <a:lnTo>
+                    <a:pt x="716225" y="1236176"/>
+                  </a:lnTo>
+                  <a:lnTo>
+                    <a:pt x="644602" y="1223080"/>
+                  </a:lnTo>
+                  <a:lnTo>
+                    <a:pt x="572980" y="1209845"/>
+                  </a:lnTo>
+                  <a:lnTo>
+                    <a:pt x="501357" y="1196470"/>
+                  </a:lnTo>
+                  <a:lnTo>
+                    <a:pt x="429735" y="1182953"/>
+                  </a:lnTo>
+                  <a:lnTo>
+                    <a:pt x="358112" y="1169292"/>
+                  </a:lnTo>
+                  <a:lnTo>
+                    <a:pt x="286490" y="1155487"/>
+                  </a:lnTo>
+                  <a:lnTo>
+                    <a:pt x="214867" y="1141535"/>
+                  </a:lnTo>
+                  <a:lnTo>
+                    <a:pt x="143245" y="1127435"/>
+                  </a:lnTo>
+                  <a:lnTo>
+                    <a:pt x="71622" y="1113185"/>
+                  </a:lnTo>
+                  <a:lnTo>
+                    <a:pt x="0" y="1098785"/>
                   </a:lnTo>
                   <a:close/>
                 </a:path>
@@ -3590,312 +3590,312 @@
           </p:nvSpPr>
           <p:spPr>
             <a:xfrm>
-              <a:off x="1172049" y="3063524"/>
-              <a:ext cx="7090630" cy="2015366"/>
+              <a:off x="1172049" y="3086446"/>
+              <a:ext cx="7090630" cy="1988078"/>
             </a:xfrm>
             <a:custGeom>
               <a:avLst/>
               <a:pathLst>
-                <a:path w="7090630" h="2015366">
+                <a:path w="7090630" h="1988078">
                   <a:moveTo>
                     <a:pt x="0" y="0"/>
                   </a:moveTo>
                   <a:lnTo>
-                    <a:pt x="71622" y="56892"/>
-                  </a:lnTo>
-                  <a:lnTo>
-                    <a:pt x="143245" y="112487"/>
-                  </a:lnTo>
-                  <a:lnTo>
-                    <a:pt x="214867" y="166813"/>
-                  </a:lnTo>
-                  <a:lnTo>
-                    <a:pt x="286490" y="219900"/>
-                  </a:lnTo>
-                  <a:lnTo>
-                    <a:pt x="358112" y="271776"/>
-                  </a:lnTo>
-                  <a:lnTo>
-                    <a:pt x="429735" y="322468"/>
-                  </a:lnTo>
-                  <a:lnTo>
-                    <a:pt x="501357" y="372003"/>
-                  </a:lnTo>
-                  <a:lnTo>
-                    <a:pt x="572980" y="420409"/>
-                  </a:lnTo>
-                  <a:lnTo>
-                    <a:pt x="644602" y="467710"/>
-                  </a:lnTo>
-                  <a:lnTo>
-                    <a:pt x="716225" y="513932"/>
-                  </a:lnTo>
-                  <a:lnTo>
-                    <a:pt x="787847" y="559100"/>
-                  </a:lnTo>
-                  <a:lnTo>
-                    <a:pt x="859470" y="603237"/>
-                  </a:lnTo>
-                  <a:lnTo>
-                    <a:pt x="931092" y="646367"/>
-                  </a:lnTo>
-                  <a:lnTo>
-                    <a:pt x="1002715" y="688513"/>
-                  </a:lnTo>
-                  <a:lnTo>
-                    <a:pt x="1074337" y="729698"/>
-                  </a:lnTo>
-                  <a:lnTo>
-                    <a:pt x="1145960" y="769943"/>
-                  </a:lnTo>
-                  <a:lnTo>
-                    <a:pt x="1217582" y="809270"/>
-                  </a:lnTo>
-                  <a:lnTo>
-                    <a:pt x="1289205" y="847700"/>
-                  </a:lnTo>
-                  <a:lnTo>
-                    <a:pt x="1360827" y="885252"/>
-                  </a:lnTo>
-                  <a:lnTo>
-                    <a:pt x="1432450" y="921949"/>
-                  </a:lnTo>
-                  <a:lnTo>
-                    <a:pt x="1504073" y="957808"/>
-                  </a:lnTo>
-                  <a:lnTo>
-                    <a:pt x="1575695" y="992849"/>
-                  </a:lnTo>
-                  <a:lnTo>
-                    <a:pt x="1647318" y="1027090"/>
-                  </a:lnTo>
-                  <a:lnTo>
-                    <a:pt x="1718940" y="1060550"/>
-                  </a:lnTo>
-                  <a:lnTo>
-                    <a:pt x="1790563" y="1093247"/>
-                  </a:lnTo>
-                  <a:lnTo>
-                    <a:pt x="1862185" y="1125198"/>
-                  </a:lnTo>
-                  <a:lnTo>
-                    <a:pt x="1933808" y="1156420"/>
-                  </a:lnTo>
-                  <a:lnTo>
-                    <a:pt x="2005430" y="1186930"/>
-                  </a:lnTo>
-                  <a:lnTo>
-                    <a:pt x="2077053" y="1216743"/>
-                  </a:lnTo>
-                  <a:lnTo>
-                    <a:pt x="2148675" y="1245877"/>
-                  </a:lnTo>
-                  <a:lnTo>
-                    <a:pt x="2220298" y="1274345"/>
-                  </a:lnTo>
-                  <a:lnTo>
-                    <a:pt x="2291920" y="1302165"/>
-                  </a:lnTo>
-                  <a:lnTo>
-                    <a:pt x="2363543" y="1329349"/>
-                  </a:lnTo>
-                  <a:lnTo>
-                    <a:pt x="2435165" y="1355914"/>
-                  </a:lnTo>
-                  <a:lnTo>
-                    <a:pt x="2506788" y="1381872"/>
-                  </a:lnTo>
-                  <a:lnTo>
-                    <a:pt x="2578410" y="1407238"/>
-                  </a:lnTo>
-                  <a:lnTo>
-                    <a:pt x="2650033" y="1432026"/>
-                  </a:lnTo>
-                  <a:lnTo>
-                    <a:pt x="2721655" y="1456248"/>
-                  </a:lnTo>
-                  <a:lnTo>
-                    <a:pt x="2793278" y="1479917"/>
-                  </a:lnTo>
-                  <a:lnTo>
-                    <a:pt x="2864901" y="1503046"/>
-                  </a:lnTo>
-                  <a:lnTo>
-                    <a:pt x="2936523" y="1525648"/>
-                  </a:lnTo>
-                  <a:lnTo>
-                    <a:pt x="3008146" y="1547734"/>
-                  </a:lnTo>
-                  <a:lnTo>
-                    <a:pt x="3079768" y="1569316"/>
-                  </a:lnTo>
-                  <a:lnTo>
-                    <a:pt x="3151391" y="1590406"/>
-                  </a:lnTo>
-                  <a:lnTo>
-                    <a:pt x="3223013" y="1611014"/>
-                  </a:lnTo>
-                  <a:lnTo>
-                    <a:pt x="3294636" y="1631153"/>
-                  </a:lnTo>
-                  <a:lnTo>
-                    <a:pt x="3366258" y="1650832"/>
-                  </a:lnTo>
-                  <a:lnTo>
-                    <a:pt x="3437881" y="1666963"/>
-                  </a:lnTo>
-                  <a:lnTo>
-                    <a:pt x="3509503" y="1675785"/>
-                  </a:lnTo>
-                  <a:lnTo>
-                    <a:pt x="3581126" y="1684514"/>
-                  </a:lnTo>
-                  <a:lnTo>
-                    <a:pt x="3652748" y="1693149"/>
-                  </a:lnTo>
-                  <a:lnTo>
-                    <a:pt x="3724371" y="1701692"/>
-                  </a:lnTo>
-                  <a:lnTo>
-                    <a:pt x="3795993" y="1710144"/>
-                  </a:lnTo>
-                  <a:lnTo>
-                    <a:pt x="3867616" y="1718506"/>
-                  </a:lnTo>
-                  <a:lnTo>
-                    <a:pt x="3939238" y="1726778"/>
-                  </a:lnTo>
-                  <a:lnTo>
-                    <a:pt x="4010861" y="1734962"/>
-                  </a:lnTo>
-                  <a:lnTo>
-                    <a:pt x="4082483" y="1743059"/>
-                  </a:lnTo>
-                  <a:lnTo>
-                    <a:pt x="4154106" y="1751070"/>
-                  </a:lnTo>
-                  <a:lnTo>
-                    <a:pt x="4225729" y="1758995"/>
-                  </a:lnTo>
-                  <a:lnTo>
-                    <a:pt x="4297351" y="1766835"/>
-                  </a:lnTo>
-                  <a:lnTo>
-                    <a:pt x="4368974" y="1774592"/>
-                  </a:lnTo>
-                  <a:lnTo>
-                    <a:pt x="4440596" y="1782266"/>
-                  </a:lnTo>
-                  <a:lnTo>
-                    <a:pt x="4512219" y="1789858"/>
-                  </a:lnTo>
-                  <a:lnTo>
-                    <a:pt x="4583841" y="1797369"/>
-                  </a:lnTo>
-                  <a:lnTo>
-                    <a:pt x="4655464" y="1804800"/>
-                  </a:lnTo>
-                  <a:lnTo>
-                    <a:pt x="4727086" y="1812152"/>
-                  </a:lnTo>
-                  <a:lnTo>
-                    <a:pt x="4798709" y="1819425"/>
-                  </a:lnTo>
-                  <a:lnTo>
-                    <a:pt x="4870331" y="1826621"/>
-                  </a:lnTo>
-                  <a:lnTo>
-                    <a:pt x="4941954" y="1833739"/>
-                  </a:lnTo>
-                  <a:lnTo>
-                    <a:pt x="5013576" y="1840782"/>
-                  </a:lnTo>
-                  <a:lnTo>
-                    <a:pt x="5085199" y="1847750"/>
-                  </a:lnTo>
-                  <a:lnTo>
-                    <a:pt x="5156821" y="1854643"/>
-                  </a:lnTo>
-                  <a:lnTo>
-                    <a:pt x="5228444" y="1861463"/>
-                  </a:lnTo>
-                  <a:lnTo>
-                    <a:pt x="5300066" y="1868210"/>
-                  </a:lnTo>
-                  <a:lnTo>
-                    <a:pt x="5371689" y="1874885"/>
-                  </a:lnTo>
-                  <a:lnTo>
-                    <a:pt x="5443311" y="1881489"/>
-                  </a:lnTo>
-                  <a:lnTo>
-                    <a:pt x="5514934" y="1888022"/>
-                  </a:lnTo>
-                  <a:lnTo>
-                    <a:pt x="5586557" y="1894486"/>
-                  </a:lnTo>
-                  <a:lnTo>
-                    <a:pt x="5658179" y="1900880"/>
-                  </a:lnTo>
-                  <a:lnTo>
-                    <a:pt x="5729802" y="1907206"/>
-                  </a:lnTo>
-                  <a:lnTo>
-                    <a:pt x="5801424" y="1913465"/>
-                  </a:lnTo>
-                  <a:lnTo>
-                    <a:pt x="5873047" y="1919657"/>
-                  </a:lnTo>
-                  <a:lnTo>
-                    <a:pt x="5944669" y="1925783"/>
-                  </a:lnTo>
-                  <a:lnTo>
-                    <a:pt x="6016292" y="1931844"/>
-                  </a:lnTo>
-                  <a:lnTo>
-                    <a:pt x="6087914" y="1937840"/>
-                  </a:lnTo>
-                  <a:lnTo>
-                    <a:pt x="6159537" y="1943772"/>
-                  </a:lnTo>
-                  <a:lnTo>
-                    <a:pt x="6231159" y="1949641"/>
-                  </a:lnTo>
-                  <a:lnTo>
-                    <a:pt x="6302782" y="1955447"/>
-                  </a:lnTo>
-                  <a:lnTo>
-                    <a:pt x="6374404" y="1961191"/>
-                  </a:lnTo>
-                  <a:lnTo>
-                    <a:pt x="6446027" y="1966873"/>
-                  </a:lnTo>
-                  <a:lnTo>
-                    <a:pt x="6517649" y="1972496"/>
-                  </a:lnTo>
-                  <a:lnTo>
-                    <a:pt x="6589272" y="1978058"/>
-                  </a:lnTo>
-                  <a:lnTo>
-                    <a:pt x="6660894" y="1983560"/>
-                  </a:lnTo>
-                  <a:lnTo>
-                    <a:pt x="6732517" y="1989004"/>
-                  </a:lnTo>
-                  <a:lnTo>
-                    <a:pt x="6804139" y="1994390"/>
-                  </a:lnTo>
-                  <a:lnTo>
-                    <a:pt x="6875762" y="1999719"/>
-                  </a:lnTo>
-                  <a:lnTo>
-                    <a:pt x="6947385" y="2004991"/>
-                  </a:lnTo>
-                  <a:lnTo>
-                    <a:pt x="7019007" y="2010206"/>
-                  </a:lnTo>
-                  <a:lnTo>
-                    <a:pt x="7090630" y="2015366"/>
+                    <a:pt x="71622" y="55902"/>
+                  </a:lnTo>
+                  <a:lnTo>
+                    <a:pt x="143245" y="110539"/>
+                  </a:lnTo>
+                  <a:lnTo>
+                    <a:pt x="214867" y="163940"/>
+                  </a:lnTo>
+                  <a:lnTo>
+                    <a:pt x="286490" y="216133"/>
+                  </a:lnTo>
+                  <a:lnTo>
+                    <a:pt x="358112" y="267145"/>
+                  </a:lnTo>
+                  <a:lnTo>
+                    <a:pt x="429735" y="317003"/>
+                  </a:lnTo>
+                  <a:lnTo>
+                    <a:pt x="501357" y="365733"/>
+                  </a:lnTo>
+                  <a:lnTo>
+                    <a:pt x="572980" y="413361"/>
+                  </a:lnTo>
+                  <a:lnTo>
+                    <a:pt x="644602" y="459911"/>
+                  </a:lnTo>
+                  <a:lnTo>
+                    <a:pt x="716225" y="505407"/>
+                  </a:lnTo>
+                  <a:lnTo>
+                    <a:pt x="787847" y="549874"/>
+                  </a:lnTo>
+                  <a:lnTo>
+                    <a:pt x="859470" y="593336"/>
+                  </a:lnTo>
+                  <a:lnTo>
+                    <a:pt x="931092" y="635813"/>
+                  </a:lnTo>
+                  <a:lnTo>
+                    <a:pt x="1002715" y="677330"/>
+                  </a:lnTo>
+                  <a:lnTo>
+                    <a:pt x="1074337" y="717908"/>
+                  </a:lnTo>
+                  <a:lnTo>
+                    <a:pt x="1145960" y="757567"/>
+                  </a:lnTo>
+                  <a:lnTo>
+                    <a:pt x="1217582" y="796329"/>
+                  </a:lnTo>
+                  <a:lnTo>
+                    <a:pt x="1289205" y="834214"/>
+                  </a:lnTo>
+                  <a:lnTo>
+                    <a:pt x="1360827" y="871242"/>
+                  </a:lnTo>
+                  <a:lnTo>
+                    <a:pt x="1432450" y="907433"/>
+                  </a:lnTo>
+                  <a:lnTo>
+                    <a:pt x="1504073" y="942804"/>
+                  </a:lnTo>
+                  <a:lnTo>
+                    <a:pt x="1575695" y="977375"/>
+                  </a:lnTo>
+                  <a:lnTo>
+                    <a:pt x="1647318" y="1011164"/>
+                  </a:lnTo>
+                  <a:lnTo>
+                    <a:pt x="1718940" y="1044189"/>
+                  </a:lnTo>
+                  <a:lnTo>
+                    <a:pt x="1790563" y="1076466"/>
+                  </a:lnTo>
+                  <a:lnTo>
+                    <a:pt x="1862185" y="1108013"/>
+                  </a:lnTo>
+                  <a:lnTo>
+                    <a:pt x="1933808" y="1138846"/>
+                  </a:lnTo>
+                  <a:lnTo>
+                    <a:pt x="2005430" y="1168982"/>
+                  </a:lnTo>
+                  <a:lnTo>
+                    <a:pt x="2077053" y="1198436"/>
+                  </a:lnTo>
+                  <a:lnTo>
+                    <a:pt x="2148675" y="1227223"/>
+                  </a:lnTo>
+                  <a:lnTo>
+                    <a:pt x="2220298" y="1255359"/>
+                  </a:lnTo>
+                  <a:lnTo>
+                    <a:pt x="2291920" y="1282859"/>
+                  </a:lnTo>
+                  <a:lnTo>
+                    <a:pt x="2363543" y="1309736"/>
+                  </a:lnTo>
+                  <a:lnTo>
+                    <a:pt x="2435165" y="1336005"/>
+                  </a:lnTo>
+                  <a:lnTo>
+                    <a:pt x="2506788" y="1361680"/>
+                  </a:lnTo>
+                  <a:lnTo>
+                    <a:pt x="2578410" y="1386774"/>
+                  </a:lnTo>
+                  <a:lnTo>
+                    <a:pt x="2650033" y="1411301"/>
+                  </a:lnTo>
+                  <a:lnTo>
+                    <a:pt x="2721655" y="1435272"/>
+                  </a:lnTo>
+                  <a:lnTo>
+                    <a:pt x="2793278" y="1458701"/>
+                  </a:lnTo>
+                  <a:lnTo>
+                    <a:pt x="2864901" y="1481600"/>
+                  </a:lnTo>
+                  <a:lnTo>
+                    <a:pt x="2936523" y="1503981"/>
+                  </a:lnTo>
+                  <a:lnTo>
+                    <a:pt x="3008146" y="1525855"/>
+                  </a:lnTo>
+                  <a:lnTo>
+                    <a:pt x="3079768" y="1547235"/>
+                  </a:lnTo>
+                  <a:lnTo>
+                    <a:pt x="3151391" y="1568130"/>
+                  </a:lnTo>
+                  <a:lnTo>
+                    <a:pt x="3223013" y="1588554"/>
+                  </a:lnTo>
+                  <a:lnTo>
+                    <a:pt x="3294636" y="1608515"/>
+                  </a:lnTo>
+                  <a:lnTo>
+                    <a:pt x="3366258" y="1628024"/>
+                  </a:lnTo>
+                  <a:lnTo>
+                    <a:pt x="3437881" y="1643997"/>
+                  </a:lnTo>
+                  <a:lnTo>
+                    <a:pt x="3509503" y="1652675"/>
+                  </a:lnTo>
+                  <a:lnTo>
+                    <a:pt x="3581126" y="1661262"/>
+                  </a:lnTo>
+                  <a:lnTo>
+                    <a:pt x="3652748" y="1669759"/>
+                  </a:lnTo>
+                  <a:lnTo>
+                    <a:pt x="3724371" y="1678167"/>
+                  </a:lnTo>
+                  <a:lnTo>
+                    <a:pt x="3795993" y="1686486"/>
+                  </a:lnTo>
+                  <a:lnTo>
+                    <a:pt x="3867616" y="1694718"/>
+                  </a:lnTo>
+                  <a:lnTo>
+                    <a:pt x="3939238" y="1702864"/>
+                  </a:lnTo>
+                  <a:lnTo>
+                    <a:pt x="4010861" y="1710924"/>
+                  </a:lnTo>
+                  <a:lnTo>
+                    <a:pt x="4082483" y="1718900"/>
+                  </a:lnTo>
+                  <a:lnTo>
+                    <a:pt x="4154106" y="1726792"/>
+                  </a:lnTo>
+                  <a:lnTo>
+                    <a:pt x="4225729" y="1734601"/>
+                  </a:lnTo>
+                  <a:lnTo>
+                    <a:pt x="4297351" y="1742328"/>
+                  </a:lnTo>
+                  <a:lnTo>
+                    <a:pt x="4368974" y="1749974"/>
+                  </a:lnTo>
+                  <a:lnTo>
+                    <a:pt x="4440596" y="1757540"/>
+                  </a:lnTo>
+                  <a:lnTo>
+                    <a:pt x="4512219" y="1765026"/>
+                  </a:lnTo>
+                  <a:lnTo>
+                    <a:pt x="4583841" y="1772434"/>
+                  </a:lnTo>
+                  <a:lnTo>
+                    <a:pt x="4655464" y="1779764"/>
+                  </a:lnTo>
+                  <a:lnTo>
+                    <a:pt x="4727086" y="1787017"/>
+                  </a:lnTo>
+                  <a:lnTo>
+                    <a:pt x="4798709" y="1794194"/>
+                  </a:lnTo>
+                  <a:lnTo>
+                    <a:pt x="4870331" y="1801296"/>
+                  </a:lnTo>
+                  <a:lnTo>
+                    <a:pt x="4941954" y="1808323"/>
+                  </a:lnTo>
+                  <a:lnTo>
+                    <a:pt x="5013576" y="1815276"/>
+                  </a:lnTo>
+                  <a:lnTo>
+                    <a:pt x="5085199" y="1822157"/>
+                  </a:lnTo>
+                  <a:lnTo>
+                    <a:pt x="5156821" y="1828965"/>
+                  </a:lnTo>
+                  <a:lnTo>
+                    <a:pt x="5228444" y="1835701"/>
+                  </a:lnTo>
+                  <a:lnTo>
+                    <a:pt x="5300066" y="1842367"/>
+                  </a:lnTo>
+                  <a:lnTo>
+                    <a:pt x="5371689" y="1848963"/>
+                  </a:lnTo>
+                  <a:lnTo>
+                    <a:pt x="5443311" y="1855490"/>
+                  </a:lnTo>
+                  <a:lnTo>
+                    <a:pt x="5514934" y="1861949"/>
+                  </a:lnTo>
+                  <a:lnTo>
+                    <a:pt x="5586557" y="1868339"/>
+                  </a:lnTo>
+                  <a:lnTo>
+                    <a:pt x="5658179" y="1874662"/>
+                  </a:lnTo>
+                  <a:lnTo>
+                    <a:pt x="5729802" y="1880920"/>
+                  </a:lnTo>
+                  <a:lnTo>
+                    <a:pt x="5801424" y="1887111"/>
+                  </a:lnTo>
+                  <a:lnTo>
+                    <a:pt x="5873047" y="1893237"/>
+                  </a:lnTo>
+                  <a:lnTo>
+                    <a:pt x="5944669" y="1899299"/>
+                  </a:lnTo>
+                  <a:lnTo>
+                    <a:pt x="6016292" y="1905298"/>
+                  </a:lnTo>
+                  <a:lnTo>
+                    <a:pt x="6087914" y="1911233"/>
+                  </a:lnTo>
+                  <a:lnTo>
+                    <a:pt x="6159537" y="1917107"/>
+                  </a:lnTo>
+                  <a:lnTo>
+                    <a:pt x="6231159" y="1922918"/>
+                  </a:lnTo>
+                  <a:lnTo>
+                    <a:pt x="6302782" y="1928669"/>
+                  </a:lnTo>
+                  <a:lnTo>
+                    <a:pt x="6374404" y="1934359"/>
+                  </a:lnTo>
+                  <a:lnTo>
+                    <a:pt x="6446027" y="1939989"/>
+                  </a:lnTo>
+                  <a:lnTo>
+                    <a:pt x="6517649" y="1945561"/>
+                  </a:lnTo>
+                  <a:lnTo>
+                    <a:pt x="6589272" y="1951074"/>
+                  </a:lnTo>
+                  <a:lnTo>
+                    <a:pt x="6660894" y="1956529"/>
+                  </a:lnTo>
+                  <a:lnTo>
+                    <a:pt x="6732517" y="1961927"/>
+                  </a:lnTo>
+                  <a:lnTo>
+                    <a:pt x="6804139" y="1967268"/>
+                  </a:lnTo>
+                  <a:lnTo>
+                    <a:pt x="6875762" y="1972553"/>
+                  </a:lnTo>
+                  <a:lnTo>
+                    <a:pt x="6947385" y="1977782"/>
+                  </a:lnTo>
+                  <a:lnTo>
+                    <a:pt x="7019007" y="1982957"/>
+                  </a:lnTo>
+                  <a:lnTo>
+                    <a:pt x="7090630" y="1988078"/>
                   </a:lnTo>
                 </a:path>
               </a:pathLst>
@@ -3915,309 +3915,309 @@
           </p:nvSpPr>
           <p:spPr>
             <a:xfrm>
-              <a:off x="1172049" y="4173591"/>
-              <a:ext cx="7090630" cy="1129806"/>
+              <a:off x="1172049" y="4185231"/>
+              <a:ext cx="7090630" cy="1115631"/>
             </a:xfrm>
             <a:custGeom>
               <a:avLst/>
               <a:pathLst>
-                <a:path w="7090630" h="1129806">
+                <a:path w="7090630" h="1115631">
                   <a:moveTo>
-                    <a:pt x="7090630" y="1129806"/>
+                    <a:pt x="7090630" y="1115631"/>
                   </a:moveTo>
                   <a:lnTo>
-                    <a:pt x="7019007" y="1123879"/>
-                  </a:lnTo>
-                  <a:lnTo>
-                    <a:pt x="6947385" y="1117814"/>
-                  </a:lnTo>
-                  <a:lnTo>
-                    <a:pt x="6875762" y="1111607"/>
-                  </a:lnTo>
-                  <a:lnTo>
-                    <a:pt x="6804139" y="1105256"/>
-                  </a:lnTo>
-                  <a:lnTo>
-                    <a:pt x="6732517" y="1098756"/>
-                  </a:lnTo>
-                  <a:lnTo>
-                    <a:pt x="6660894" y="1092104"/>
-                  </a:lnTo>
-                  <a:lnTo>
-                    <a:pt x="6589272" y="1085297"/>
-                  </a:lnTo>
-                  <a:lnTo>
-                    <a:pt x="6517649" y="1078331"/>
-                  </a:lnTo>
-                  <a:lnTo>
-                    <a:pt x="6446027" y="1071203"/>
-                  </a:lnTo>
-                  <a:lnTo>
-                    <a:pt x="6374404" y="1063908"/>
-                  </a:lnTo>
-                  <a:lnTo>
-                    <a:pt x="6302782" y="1056443"/>
-                  </a:lnTo>
-                  <a:lnTo>
-                    <a:pt x="6231159" y="1048803"/>
-                  </a:lnTo>
-                  <a:lnTo>
-                    <a:pt x="6159537" y="1040986"/>
-                  </a:lnTo>
-                  <a:lnTo>
-                    <a:pt x="6087914" y="1032985"/>
-                  </a:lnTo>
-                  <a:lnTo>
-                    <a:pt x="6016292" y="1024798"/>
-                  </a:lnTo>
-                  <a:lnTo>
-                    <a:pt x="5944669" y="1016420"/>
-                  </a:lnTo>
-                  <a:lnTo>
-                    <a:pt x="5873047" y="1007846"/>
-                  </a:lnTo>
-                  <a:lnTo>
-                    <a:pt x="5801424" y="999072"/>
-                  </a:lnTo>
-                  <a:lnTo>
-                    <a:pt x="5729802" y="990093"/>
-                  </a:lnTo>
-                  <a:lnTo>
-                    <a:pt x="5658179" y="980904"/>
-                  </a:lnTo>
-                  <a:lnTo>
-                    <a:pt x="5586557" y="971501"/>
-                  </a:lnTo>
-                  <a:lnTo>
-                    <a:pt x="5514934" y="961879"/>
-                  </a:lnTo>
-                  <a:lnTo>
-                    <a:pt x="5443311" y="952031"/>
-                  </a:lnTo>
-                  <a:lnTo>
-                    <a:pt x="5371689" y="941954"/>
-                  </a:lnTo>
-                  <a:lnTo>
-                    <a:pt x="5300066" y="931642"/>
-                  </a:lnTo>
-                  <a:lnTo>
-                    <a:pt x="5228444" y="921089"/>
-                  </a:lnTo>
-                  <a:lnTo>
-                    <a:pt x="5156821" y="910289"/>
-                  </a:lnTo>
-                  <a:lnTo>
-                    <a:pt x="5085199" y="899237"/>
-                  </a:lnTo>
-                  <a:lnTo>
-                    <a:pt x="5013576" y="887928"/>
-                  </a:lnTo>
-                  <a:lnTo>
-                    <a:pt x="4941954" y="876354"/>
-                  </a:lnTo>
-                  <a:lnTo>
-                    <a:pt x="4870331" y="864510"/>
-                  </a:lnTo>
-                  <a:lnTo>
-                    <a:pt x="4798709" y="852389"/>
-                  </a:lnTo>
-                  <a:lnTo>
-                    <a:pt x="4727086" y="839986"/>
-                  </a:lnTo>
-                  <a:lnTo>
-                    <a:pt x="4655464" y="827293"/>
-                  </a:lnTo>
-                  <a:lnTo>
-                    <a:pt x="4583841" y="814303"/>
-                  </a:lnTo>
-                  <a:lnTo>
-                    <a:pt x="4512219" y="801011"/>
-                  </a:lnTo>
-                  <a:lnTo>
-                    <a:pt x="4440596" y="787408"/>
-                  </a:lnTo>
-                  <a:lnTo>
-                    <a:pt x="4368974" y="773487"/>
-                  </a:lnTo>
-                  <a:lnTo>
-                    <a:pt x="4297351" y="759241"/>
-                  </a:lnTo>
-                  <a:lnTo>
-                    <a:pt x="4225729" y="744663"/>
-                  </a:lnTo>
-                  <a:lnTo>
-                    <a:pt x="4154106" y="729744"/>
-                  </a:lnTo>
-                  <a:lnTo>
-                    <a:pt x="4082483" y="714478"/>
-                  </a:lnTo>
-                  <a:lnTo>
-                    <a:pt x="4010861" y="698854"/>
-                  </a:lnTo>
-                  <a:lnTo>
-                    <a:pt x="3939238" y="682866"/>
-                  </a:lnTo>
-                  <a:lnTo>
-                    <a:pt x="3867616" y="666505"/>
-                  </a:lnTo>
-                  <a:lnTo>
-                    <a:pt x="3795993" y="649761"/>
-                  </a:lnTo>
-                  <a:lnTo>
-                    <a:pt x="3724371" y="632627"/>
-                  </a:lnTo>
-                  <a:lnTo>
-                    <a:pt x="3652748" y="615093"/>
-                  </a:lnTo>
-                  <a:lnTo>
-                    <a:pt x="3581126" y="597149"/>
-                  </a:lnTo>
-                  <a:lnTo>
-                    <a:pt x="3509503" y="578787"/>
-                  </a:lnTo>
-                  <a:lnTo>
-                    <a:pt x="3437881" y="559995"/>
-                  </a:lnTo>
-                  <a:lnTo>
-                    <a:pt x="3366258" y="547979"/>
-                  </a:lnTo>
-                  <a:lnTo>
-                    <a:pt x="3294636" y="538965"/>
-                  </a:lnTo>
-                  <a:lnTo>
-                    <a:pt x="3223013" y="529854"/>
-                  </a:lnTo>
-                  <a:lnTo>
-                    <a:pt x="3151391" y="520644"/>
-                  </a:lnTo>
-                  <a:lnTo>
-                    <a:pt x="3079768" y="511336"/>
-                  </a:lnTo>
-                  <a:lnTo>
-                    <a:pt x="3008146" y="501926"/>
-                  </a:lnTo>
-                  <a:lnTo>
-                    <a:pt x="2936523" y="492416"/>
-                  </a:lnTo>
-                  <a:lnTo>
-                    <a:pt x="2864901" y="482803"/>
-                  </a:lnTo>
-                  <a:lnTo>
-                    <a:pt x="2793278" y="473086"/>
-                  </a:lnTo>
-                  <a:lnTo>
-                    <a:pt x="2721655" y="463264"/>
-                  </a:lnTo>
-                  <a:lnTo>
-                    <a:pt x="2650033" y="453336"/>
-                  </a:lnTo>
-                  <a:lnTo>
-                    <a:pt x="2578410" y="443302"/>
-                  </a:lnTo>
-                  <a:lnTo>
-                    <a:pt x="2506788" y="433159"/>
-                  </a:lnTo>
-                  <a:lnTo>
-                    <a:pt x="2435165" y="422906"/>
-                  </a:lnTo>
-                  <a:lnTo>
-                    <a:pt x="2363543" y="412543"/>
-                  </a:lnTo>
-                  <a:lnTo>
-                    <a:pt x="2291920" y="402069"/>
-                  </a:lnTo>
-                  <a:lnTo>
-                    <a:pt x="2220298" y="391481"/>
-                  </a:lnTo>
-                  <a:lnTo>
-                    <a:pt x="2148675" y="380779"/>
-                  </a:lnTo>
-                  <a:lnTo>
-                    <a:pt x="2077053" y="369962"/>
-                  </a:lnTo>
-                  <a:lnTo>
-                    <a:pt x="2005430" y="359028"/>
-                  </a:lnTo>
-                  <a:lnTo>
-                    <a:pt x="1933808" y="347976"/>
-                  </a:lnTo>
-                  <a:lnTo>
-                    <a:pt x="1862185" y="336804"/>
-                  </a:lnTo>
-                  <a:lnTo>
-                    <a:pt x="1790563" y="325513"/>
-                  </a:lnTo>
-                  <a:lnTo>
-                    <a:pt x="1718940" y="314099"/>
-                  </a:lnTo>
-                  <a:lnTo>
-                    <a:pt x="1647318" y="302563"/>
-                  </a:lnTo>
-                  <a:lnTo>
-                    <a:pt x="1575695" y="290902"/>
-                  </a:lnTo>
-                  <a:lnTo>
-                    <a:pt x="1504073" y="279115"/>
-                  </a:lnTo>
-                  <a:lnTo>
-                    <a:pt x="1432450" y="267201"/>
-                  </a:lnTo>
-                  <a:lnTo>
-                    <a:pt x="1360827" y="255159"/>
-                  </a:lnTo>
-                  <a:lnTo>
-                    <a:pt x="1289205" y="242986"/>
-                  </a:lnTo>
-                  <a:lnTo>
-                    <a:pt x="1217582" y="230683"/>
-                  </a:lnTo>
-                  <a:lnTo>
-                    <a:pt x="1145960" y="218246"/>
-                  </a:lnTo>
-                  <a:lnTo>
-                    <a:pt x="1074337" y="205676"/>
-                  </a:lnTo>
-                  <a:lnTo>
-                    <a:pt x="1002715" y="192970"/>
-                  </a:lnTo>
-                  <a:lnTo>
-                    <a:pt x="931092" y="180127"/>
-                  </a:lnTo>
-                  <a:lnTo>
-                    <a:pt x="859470" y="167145"/>
-                  </a:lnTo>
-                  <a:lnTo>
-                    <a:pt x="787847" y="154023"/>
-                  </a:lnTo>
-                  <a:lnTo>
-                    <a:pt x="716225" y="140760"/>
-                  </a:lnTo>
-                  <a:lnTo>
-                    <a:pt x="644602" y="127354"/>
-                  </a:lnTo>
-                  <a:lnTo>
-                    <a:pt x="572980" y="113803"/>
-                  </a:lnTo>
-                  <a:lnTo>
-                    <a:pt x="501357" y="100106"/>
-                  </a:lnTo>
-                  <a:lnTo>
-                    <a:pt x="429735" y="86261"/>
-                  </a:lnTo>
-                  <a:lnTo>
-                    <a:pt x="358112" y="72267"/>
-                  </a:lnTo>
-                  <a:lnTo>
-                    <a:pt x="286490" y="58122"/>
-                  </a:lnTo>
-                  <a:lnTo>
-                    <a:pt x="214867" y="43824"/>
-                  </a:lnTo>
-                  <a:lnTo>
-                    <a:pt x="143245" y="29373"/>
-                  </a:lnTo>
-                  <a:lnTo>
-                    <a:pt x="71622" y="14765"/>
+                    <a:pt x="7019007" y="1109696"/>
+                  </a:lnTo>
+                  <a:lnTo>
+                    <a:pt x="6947385" y="1103624"/>
+                  </a:lnTo>
+                  <a:lnTo>
+                    <a:pt x="6875762" y="1097411"/>
+                  </a:lnTo>
+                  <a:lnTo>
+                    <a:pt x="6804139" y="1091054"/>
+                  </a:lnTo>
+                  <a:lnTo>
+                    <a:pt x="6732517" y="1084550"/>
+                  </a:lnTo>
+                  <a:lnTo>
+                    <a:pt x="6660894" y="1077896"/>
+                  </a:lnTo>
+                  <a:lnTo>
+                    <a:pt x="6589272" y="1071087"/>
+                  </a:lnTo>
+                  <a:lnTo>
+                    <a:pt x="6517649" y="1064121"/>
+                  </a:lnTo>
+                  <a:lnTo>
+                    <a:pt x="6446027" y="1056993"/>
+                  </a:lnTo>
+                  <a:lnTo>
+                    <a:pt x="6374404" y="1049701"/>
+                  </a:lnTo>
+                  <a:lnTo>
+                    <a:pt x="6302782" y="1042240"/>
+                  </a:lnTo>
+                  <a:lnTo>
+                    <a:pt x="6231159" y="1034606"/>
+                  </a:lnTo>
+                  <a:lnTo>
+                    <a:pt x="6159537" y="1026795"/>
+                  </a:lnTo>
+                  <a:lnTo>
+                    <a:pt x="6087914" y="1018803"/>
+                  </a:lnTo>
+                  <a:lnTo>
+                    <a:pt x="6016292" y="1010627"/>
+                  </a:lnTo>
+                  <a:lnTo>
+                    <a:pt x="5944669" y="1002261"/>
+                  </a:lnTo>
+                  <a:lnTo>
+                    <a:pt x="5873047" y="993702"/>
+                  </a:lnTo>
+                  <a:lnTo>
+                    <a:pt x="5801424" y="984944"/>
+                  </a:lnTo>
+                  <a:lnTo>
+                    <a:pt x="5729802" y="975984"/>
+                  </a:lnTo>
+                  <a:lnTo>
+                    <a:pt x="5658179" y="966816"/>
+                  </a:lnTo>
+                  <a:lnTo>
+                    <a:pt x="5586557" y="957436"/>
+                  </a:lnTo>
+                  <a:lnTo>
+                    <a:pt x="5514934" y="947839"/>
+                  </a:lnTo>
+                  <a:lnTo>
+                    <a:pt x="5443311" y="938020"/>
+                  </a:lnTo>
+                  <a:lnTo>
+                    <a:pt x="5371689" y="927973"/>
+                  </a:lnTo>
+                  <a:lnTo>
+                    <a:pt x="5300066" y="917694"/>
+                  </a:lnTo>
+                  <a:lnTo>
+                    <a:pt x="5228444" y="907177"/>
+                  </a:lnTo>
+                  <a:lnTo>
+                    <a:pt x="5156821" y="896416"/>
+                  </a:lnTo>
+                  <a:lnTo>
+                    <a:pt x="5085199" y="885407"/>
+                  </a:lnTo>
+                  <a:lnTo>
+                    <a:pt x="5013576" y="874142"/>
+                  </a:lnTo>
+                  <a:lnTo>
+                    <a:pt x="4941954" y="862617"/>
+                  </a:lnTo>
+                  <a:lnTo>
+                    <a:pt x="4870331" y="850825"/>
+                  </a:lnTo>
+                  <a:lnTo>
+                    <a:pt x="4798709" y="838760"/>
+                  </a:lnTo>
+                  <a:lnTo>
+                    <a:pt x="4727086" y="826416"/>
+                  </a:lnTo>
+                  <a:lnTo>
+                    <a:pt x="4655464" y="813785"/>
+                  </a:lnTo>
+                  <a:lnTo>
+                    <a:pt x="4583841" y="800863"/>
+                  </a:lnTo>
+                  <a:lnTo>
+                    <a:pt x="4512219" y="787641"/>
+                  </a:lnTo>
+                  <a:lnTo>
+                    <a:pt x="4440596" y="774114"/>
+                  </a:lnTo>
+                  <a:lnTo>
+                    <a:pt x="4368974" y="760273"/>
+                  </a:lnTo>
+                  <a:lnTo>
+                    <a:pt x="4297351" y="746112"/>
+                  </a:lnTo>
+                  <a:lnTo>
+                    <a:pt x="4225729" y="731623"/>
+                  </a:lnTo>
+                  <a:lnTo>
+                    <a:pt x="4154106" y="716798"/>
+                  </a:lnTo>
+                  <a:lnTo>
+                    <a:pt x="4082483" y="701631"/>
+                  </a:lnTo>
+                  <a:lnTo>
+                    <a:pt x="4010861" y="686112"/>
+                  </a:lnTo>
+                  <a:lnTo>
+                    <a:pt x="3939238" y="670234"/>
+                  </a:lnTo>
+                  <a:lnTo>
+                    <a:pt x="3867616" y="653989"/>
+                  </a:lnTo>
+                  <a:lnTo>
+                    <a:pt x="3795993" y="637367"/>
+                  </a:lnTo>
+                  <a:lnTo>
+                    <a:pt x="3724371" y="620361"/>
+                  </a:lnTo>
+                  <a:lnTo>
+                    <a:pt x="3652748" y="602961"/>
+                  </a:lnTo>
+                  <a:lnTo>
+                    <a:pt x="3581126" y="585158"/>
+                  </a:lnTo>
+                  <a:lnTo>
+                    <a:pt x="3509503" y="566943"/>
+                  </a:lnTo>
+                  <a:lnTo>
+                    <a:pt x="3437881" y="548307"/>
+                  </a:lnTo>
+                  <a:lnTo>
+                    <a:pt x="3366258" y="536441"/>
+                  </a:lnTo>
+                  <a:lnTo>
+                    <a:pt x="3294636" y="527578"/>
+                  </a:lnTo>
+                  <a:lnTo>
+                    <a:pt x="3223013" y="518621"/>
+                  </a:lnTo>
+                  <a:lnTo>
+                    <a:pt x="3151391" y="509569"/>
+                  </a:lnTo>
+                  <a:lnTo>
+                    <a:pt x="3079768" y="500421"/>
+                  </a:lnTo>
+                  <a:lnTo>
+                    <a:pt x="3008146" y="491175"/>
+                  </a:lnTo>
+                  <a:lnTo>
+                    <a:pt x="2936523" y="481832"/>
+                  </a:lnTo>
+                  <a:lnTo>
+                    <a:pt x="2864901" y="472390"/>
+                  </a:lnTo>
+                  <a:lnTo>
+                    <a:pt x="2793278" y="462847"/>
+                  </a:lnTo>
+                  <a:lnTo>
+                    <a:pt x="2721655" y="453203"/>
+                  </a:lnTo>
+                  <a:lnTo>
+                    <a:pt x="2650033" y="443457"/>
+                  </a:lnTo>
+                  <a:lnTo>
+                    <a:pt x="2578410" y="433608"/>
+                  </a:lnTo>
+                  <a:lnTo>
+                    <a:pt x="2506788" y="423654"/>
+                  </a:lnTo>
+                  <a:lnTo>
+                    <a:pt x="2435165" y="413594"/>
+                  </a:lnTo>
+                  <a:lnTo>
+                    <a:pt x="2363543" y="403428"/>
+                  </a:lnTo>
+                  <a:lnTo>
+                    <a:pt x="2291920" y="393154"/>
+                  </a:lnTo>
+                  <a:lnTo>
+                    <a:pt x="2220298" y="382771"/>
+                  </a:lnTo>
+                  <a:lnTo>
+                    <a:pt x="2148675" y="372277"/>
+                  </a:lnTo>
+                  <a:lnTo>
+                    <a:pt x="2077053" y="361673"/>
+                  </a:lnTo>
+                  <a:lnTo>
+                    <a:pt x="2005430" y="350956"/>
+                  </a:lnTo>
+                  <a:lnTo>
+                    <a:pt x="1933808" y="340125"/>
+                  </a:lnTo>
+                  <a:lnTo>
+                    <a:pt x="1862185" y="329180"/>
+                  </a:lnTo>
+                  <a:lnTo>
+                    <a:pt x="1790563" y="318118"/>
+                  </a:lnTo>
+                  <a:lnTo>
+                    <a:pt x="1718940" y="306939"/>
+                  </a:lnTo>
+                  <a:lnTo>
+                    <a:pt x="1647318" y="295641"/>
+                  </a:lnTo>
+                  <a:lnTo>
+                    <a:pt x="1575695" y="284224"/>
+                  </a:lnTo>
+                  <a:lnTo>
+                    <a:pt x="1504073" y="272685"/>
+                  </a:lnTo>
+                  <a:lnTo>
+                    <a:pt x="1432450" y="261024"/>
+                  </a:lnTo>
+                  <a:lnTo>
+                    <a:pt x="1360827" y="249240"/>
+                  </a:lnTo>
+                  <a:lnTo>
+                    <a:pt x="1289205" y="237330"/>
+                  </a:lnTo>
+                  <a:lnTo>
+                    <a:pt x="1217582" y="225294"/>
+                  </a:lnTo>
+                  <a:lnTo>
+                    <a:pt x="1145960" y="213131"/>
+                  </a:lnTo>
+                  <a:lnTo>
+                    <a:pt x="1074337" y="200838"/>
+                  </a:lnTo>
+                  <a:lnTo>
+                    <a:pt x="1002715" y="188415"/>
+                  </a:lnTo>
+                  <a:lnTo>
+                    <a:pt x="931092" y="175860"/>
+                  </a:lnTo>
+                  <a:lnTo>
+                    <a:pt x="859470" y="163172"/>
+                  </a:lnTo>
+                  <a:lnTo>
+                    <a:pt x="787847" y="150350"/>
+                  </a:lnTo>
+                  <a:lnTo>
+                    <a:pt x="716225" y="137391"/>
+                  </a:lnTo>
+                  <a:lnTo>
+                    <a:pt x="644602" y="124295"/>
+                  </a:lnTo>
+                  <a:lnTo>
+                    <a:pt x="572980" y="111060"/>
+                  </a:lnTo>
+                  <a:lnTo>
+                    <a:pt x="501357" y="97685"/>
+                  </a:lnTo>
+                  <a:lnTo>
+                    <a:pt x="429735" y="84168"/>
+                  </a:lnTo>
+                  <a:lnTo>
+                    <a:pt x="358112" y="70507"/>
+                  </a:lnTo>
+                  <a:lnTo>
+                    <a:pt x="286490" y="56701"/>
+                  </a:lnTo>
+                  <a:lnTo>
+                    <a:pt x="214867" y="42750"/>
+                  </a:lnTo>
+                  <a:lnTo>
+                    <a:pt x="143245" y="28650"/>
+                  </a:lnTo>
+                  <a:lnTo>
+                    <a:pt x="71622" y="14400"/>
                   </a:lnTo>
                   <a:lnTo>
                     <a:pt x="0" y="0"/>
@@ -4240,312 +4240,312 @@
           </p:nvSpPr>
           <p:spPr>
             <a:xfrm>
-              <a:off x="1172049" y="3699707"/>
-              <a:ext cx="7090630" cy="1509070"/>
+              <a:off x="1172049" y="3716057"/>
+              <a:ext cx="7090630" cy="1489390"/>
             </a:xfrm>
             <a:custGeom>
               <a:avLst/>
               <a:pathLst>
-                <a:path w="7090630" h="1509070">
+                <a:path w="7090630" h="1489390">
                   <a:moveTo>
                     <a:pt x="0" y="0"/>
                   </a:moveTo>
                   <a:lnTo>
-                    <a:pt x="71622" y="31135"/>
-                  </a:lnTo>
-                  <a:lnTo>
-                    <a:pt x="143245" y="61748"/>
-                  </a:lnTo>
-                  <a:lnTo>
-                    <a:pt x="214867" y="91848"/>
-                  </a:lnTo>
-                  <a:lnTo>
-                    <a:pt x="286490" y="121444"/>
-                  </a:lnTo>
-                  <a:lnTo>
-                    <a:pt x="358112" y="150543"/>
-                  </a:lnTo>
-                  <a:lnTo>
-                    <a:pt x="429735" y="179155"/>
-                  </a:lnTo>
-                  <a:lnTo>
-                    <a:pt x="501357" y="207288"/>
-                  </a:lnTo>
-                  <a:lnTo>
-                    <a:pt x="572980" y="234948"/>
-                  </a:lnTo>
-                  <a:lnTo>
-                    <a:pt x="644602" y="262145"/>
-                  </a:lnTo>
-                  <a:lnTo>
-                    <a:pt x="716225" y="288887"/>
-                  </a:lnTo>
-                  <a:lnTo>
-                    <a:pt x="787847" y="315180"/>
-                  </a:lnTo>
-                  <a:lnTo>
-                    <a:pt x="859470" y="341032"/>
-                  </a:lnTo>
-                  <a:lnTo>
-                    <a:pt x="931092" y="366451"/>
-                  </a:lnTo>
-                  <a:lnTo>
-                    <a:pt x="1002715" y="391444"/>
-                  </a:lnTo>
-                  <a:lnTo>
-                    <a:pt x="1074337" y="416018"/>
-                  </a:lnTo>
-                  <a:lnTo>
-                    <a:pt x="1145960" y="440180"/>
-                  </a:lnTo>
-                  <a:lnTo>
-                    <a:pt x="1217582" y="463937"/>
-                  </a:lnTo>
-                  <a:lnTo>
-                    <a:pt x="1289205" y="487296"/>
-                  </a:lnTo>
-                  <a:lnTo>
-                    <a:pt x="1360827" y="510263"/>
-                  </a:lnTo>
-                  <a:lnTo>
-                    <a:pt x="1432450" y="532846"/>
-                  </a:lnTo>
-                  <a:lnTo>
-                    <a:pt x="1504073" y="555050"/>
-                  </a:lnTo>
-                  <a:lnTo>
-                    <a:pt x="1575695" y="576881"/>
-                  </a:lnTo>
-                  <a:lnTo>
-                    <a:pt x="1647318" y="598347"/>
-                  </a:lnTo>
-                  <a:lnTo>
-                    <a:pt x="1718940" y="619453"/>
-                  </a:lnTo>
-                  <a:lnTo>
-                    <a:pt x="1790563" y="640205"/>
-                  </a:lnTo>
-                  <a:lnTo>
-                    <a:pt x="1862185" y="660610"/>
-                  </a:lnTo>
-                  <a:lnTo>
-                    <a:pt x="1933808" y="680672"/>
-                  </a:lnTo>
-                  <a:lnTo>
-                    <a:pt x="2005430" y="700398"/>
-                  </a:lnTo>
-                  <a:lnTo>
-                    <a:pt x="2077053" y="719794"/>
-                  </a:lnTo>
-                  <a:lnTo>
-                    <a:pt x="2148675" y="738864"/>
-                  </a:lnTo>
-                  <a:lnTo>
-                    <a:pt x="2220298" y="757615"/>
-                  </a:lnTo>
-                  <a:lnTo>
-                    <a:pt x="2291920" y="776051"/>
-                  </a:lnTo>
-                  <a:lnTo>
-                    <a:pt x="2363543" y="794178"/>
-                  </a:lnTo>
-                  <a:lnTo>
-                    <a:pt x="2435165" y="812002"/>
-                  </a:lnTo>
-                  <a:lnTo>
-                    <a:pt x="2506788" y="829527"/>
-                  </a:lnTo>
-                  <a:lnTo>
-                    <a:pt x="2578410" y="846758"/>
-                  </a:lnTo>
-                  <a:lnTo>
-                    <a:pt x="2650033" y="863700"/>
-                  </a:lnTo>
-                  <a:lnTo>
-                    <a:pt x="2721655" y="880358"/>
-                  </a:lnTo>
-                  <a:lnTo>
-                    <a:pt x="2793278" y="896738"/>
-                  </a:lnTo>
-                  <a:lnTo>
-                    <a:pt x="2864901" y="912842"/>
-                  </a:lnTo>
-                  <a:lnTo>
-                    <a:pt x="2936523" y="928677"/>
-                  </a:lnTo>
-                  <a:lnTo>
-                    <a:pt x="3008146" y="944246"/>
-                  </a:lnTo>
-                  <a:lnTo>
-                    <a:pt x="3079768" y="959554"/>
-                  </a:lnTo>
-                  <a:lnTo>
-                    <a:pt x="3151391" y="974606"/>
-                  </a:lnTo>
-                  <a:lnTo>
-                    <a:pt x="3223013" y="989405"/>
-                  </a:lnTo>
-                  <a:lnTo>
-                    <a:pt x="3294636" y="1003956"/>
-                  </a:lnTo>
-                  <a:lnTo>
-                    <a:pt x="3366258" y="1018264"/>
-                  </a:lnTo>
-                  <a:lnTo>
-                    <a:pt x="3437881" y="1032331"/>
-                  </a:lnTo>
-                  <a:lnTo>
-                    <a:pt x="3509503" y="1046163"/>
-                  </a:lnTo>
-                  <a:lnTo>
-                    <a:pt x="3581126" y="1059763"/>
-                  </a:lnTo>
-                  <a:lnTo>
-                    <a:pt x="3652748" y="1073135"/>
-                  </a:lnTo>
-                  <a:lnTo>
-                    <a:pt x="3724371" y="1086283"/>
-                  </a:lnTo>
-                  <a:lnTo>
-                    <a:pt x="3795993" y="1099210"/>
-                  </a:lnTo>
-                  <a:lnTo>
-                    <a:pt x="3867616" y="1111921"/>
-                  </a:lnTo>
-                  <a:lnTo>
-                    <a:pt x="3939238" y="1124419"/>
-                  </a:lnTo>
-                  <a:lnTo>
-                    <a:pt x="4010861" y="1136707"/>
-                  </a:lnTo>
-                  <a:lnTo>
-                    <a:pt x="4082483" y="1148789"/>
-                  </a:lnTo>
-                  <a:lnTo>
-                    <a:pt x="4154106" y="1160669"/>
-                  </a:lnTo>
-                  <a:lnTo>
-                    <a:pt x="4225729" y="1172350"/>
-                  </a:lnTo>
-                  <a:lnTo>
-                    <a:pt x="4297351" y="1183834"/>
-                  </a:lnTo>
-                  <a:lnTo>
-                    <a:pt x="4368974" y="1195127"/>
-                  </a:lnTo>
-                  <a:lnTo>
-                    <a:pt x="4440596" y="1206230"/>
-                  </a:lnTo>
-                  <a:lnTo>
-                    <a:pt x="4512219" y="1217147"/>
-                  </a:lnTo>
-                  <a:lnTo>
-                    <a:pt x="4583841" y="1227881"/>
-                  </a:lnTo>
-                  <a:lnTo>
-                    <a:pt x="4655464" y="1238435"/>
-                  </a:lnTo>
-                  <a:lnTo>
-                    <a:pt x="4727086" y="1248812"/>
-                  </a:lnTo>
-                  <a:lnTo>
-                    <a:pt x="4798709" y="1259015"/>
-                  </a:lnTo>
-                  <a:lnTo>
-                    <a:pt x="4870331" y="1269047"/>
-                  </a:lnTo>
-                  <a:lnTo>
-                    <a:pt x="4941954" y="1278911"/>
-                  </a:lnTo>
-                  <a:lnTo>
-                    <a:pt x="5013576" y="1288610"/>
-                  </a:lnTo>
-                  <a:lnTo>
-                    <a:pt x="5085199" y="1298146"/>
-                  </a:lnTo>
-                  <a:lnTo>
-                    <a:pt x="5156821" y="1307523"/>
-                  </a:lnTo>
-                  <a:lnTo>
-                    <a:pt x="5228444" y="1316742"/>
-                  </a:lnTo>
-                  <a:lnTo>
-                    <a:pt x="5300066" y="1325806"/>
-                  </a:lnTo>
-                  <a:lnTo>
-                    <a:pt x="5371689" y="1334719"/>
-                  </a:lnTo>
-                  <a:lnTo>
-                    <a:pt x="5443311" y="1343482"/>
-                  </a:lnTo>
-                  <a:lnTo>
-                    <a:pt x="5514934" y="1352099"/>
-                  </a:lnTo>
-                  <a:lnTo>
-                    <a:pt x="5586557" y="1360571"/>
-                  </a:lnTo>
-                  <a:lnTo>
-                    <a:pt x="5658179" y="1368901"/>
-                  </a:lnTo>
-                  <a:lnTo>
-                    <a:pt x="5729802" y="1377091"/>
-                  </a:lnTo>
-                  <a:lnTo>
-                    <a:pt x="5801424" y="1385144"/>
-                  </a:lnTo>
-                  <a:lnTo>
-                    <a:pt x="5873047" y="1393062"/>
-                  </a:lnTo>
-                  <a:lnTo>
-                    <a:pt x="5944669" y="1400848"/>
-                  </a:lnTo>
-                  <a:lnTo>
-                    <a:pt x="6016292" y="1408503"/>
-                  </a:lnTo>
-                  <a:lnTo>
-                    <a:pt x="6087914" y="1416029"/>
-                  </a:lnTo>
-                  <a:lnTo>
-                    <a:pt x="6159537" y="1423430"/>
-                  </a:lnTo>
-                  <a:lnTo>
-                    <a:pt x="6231159" y="1430706"/>
-                  </a:lnTo>
-                  <a:lnTo>
-                    <a:pt x="6302782" y="1437860"/>
-                  </a:lnTo>
-                  <a:lnTo>
-                    <a:pt x="6374404" y="1444895"/>
-                  </a:lnTo>
-                  <a:lnTo>
-                    <a:pt x="6446027" y="1451811"/>
-                  </a:lnTo>
-                  <a:lnTo>
-                    <a:pt x="6517649" y="1458612"/>
-                  </a:lnTo>
-                  <a:lnTo>
-                    <a:pt x="6589272" y="1465299"/>
-                  </a:lnTo>
-                  <a:lnTo>
-                    <a:pt x="6660894" y="1471873"/>
-                  </a:lnTo>
-                  <a:lnTo>
-                    <a:pt x="6732517" y="1478338"/>
-                  </a:lnTo>
-                  <a:lnTo>
-                    <a:pt x="6804139" y="1484694"/>
-                  </a:lnTo>
-                  <a:lnTo>
-                    <a:pt x="6875762" y="1490943"/>
-                  </a:lnTo>
-                  <a:lnTo>
-                    <a:pt x="6947385" y="1497088"/>
-                  </a:lnTo>
-                  <a:lnTo>
-                    <a:pt x="7019007" y="1503130"/>
-                  </a:lnTo>
-                  <a:lnTo>
-                    <a:pt x="7090630" y="1509070"/>
+                    <a:pt x="71622" y="30525"/>
+                  </a:lnTo>
+                  <a:lnTo>
+                    <a:pt x="143245" y="60544"/>
+                  </a:lnTo>
+                  <a:lnTo>
+                    <a:pt x="214867" y="90066"/>
+                  </a:lnTo>
+                  <a:lnTo>
+                    <a:pt x="286490" y="119098"/>
+                  </a:lnTo>
+                  <a:lnTo>
+                    <a:pt x="358112" y="147649"/>
+                  </a:lnTo>
+                  <a:lnTo>
+                    <a:pt x="429735" y="175727"/>
+                  </a:lnTo>
+                  <a:lnTo>
+                    <a:pt x="501357" y="203339"/>
+                  </a:lnTo>
+                  <a:lnTo>
+                    <a:pt x="572980" y="230493"/>
+                  </a:lnTo>
+                  <a:lnTo>
+                    <a:pt x="644602" y="257198"/>
+                  </a:lnTo>
+                  <a:lnTo>
+                    <a:pt x="716225" y="283459"/>
+                  </a:lnTo>
+                  <a:lnTo>
+                    <a:pt x="787847" y="309285"/>
+                  </a:lnTo>
+                  <a:lnTo>
+                    <a:pt x="859470" y="334683"/>
+                  </a:lnTo>
+                  <a:lnTo>
+                    <a:pt x="931092" y="359659"/>
+                  </a:lnTo>
+                  <a:lnTo>
+                    <a:pt x="1002715" y="384222"/>
+                  </a:lnTo>
+                  <a:lnTo>
+                    <a:pt x="1074337" y="408378"/>
+                  </a:lnTo>
+                  <a:lnTo>
+                    <a:pt x="1145960" y="432132"/>
+                  </a:lnTo>
+                  <a:lnTo>
+                    <a:pt x="1217582" y="455494"/>
+                  </a:lnTo>
+                  <a:lnTo>
+                    <a:pt x="1289205" y="478467"/>
+                  </a:lnTo>
+                  <a:lnTo>
+                    <a:pt x="1360827" y="501060"/>
+                  </a:lnTo>
+                  <a:lnTo>
+                    <a:pt x="1432450" y="523279"/>
+                  </a:lnTo>
+                  <a:lnTo>
+                    <a:pt x="1504073" y="545129"/>
+                  </a:lnTo>
+                  <a:lnTo>
+                    <a:pt x="1575695" y="566616"/>
+                  </a:lnTo>
+                  <a:lnTo>
+                    <a:pt x="1647318" y="587748"/>
+                  </a:lnTo>
+                  <a:lnTo>
+                    <a:pt x="1718940" y="608529"/>
+                  </a:lnTo>
+                  <a:lnTo>
+                    <a:pt x="1790563" y="628965"/>
+                  </a:lnTo>
+                  <a:lnTo>
+                    <a:pt x="1862185" y="649063"/>
+                  </a:lnTo>
+                  <a:lnTo>
+                    <a:pt x="1933808" y="668828"/>
+                  </a:lnTo>
+                  <a:lnTo>
+                    <a:pt x="2005430" y="688265"/>
+                  </a:lnTo>
+                  <a:lnTo>
+                    <a:pt x="2077053" y="707379"/>
+                  </a:lnTo>
+                  <a:lnTo>
+                    <a:pt x="2148675" y="726177"/>
+                  </a:lnTo>
+                  <a:lnTo>
+                    <a:pt x="2220298" y="744663"/>
+                  </a:lnTo>
+                  <a:lnTo>
+                    <a:pt x="2291920" y="762843"/>
+                  </a:lnTo>
+                  <a:lnTo>
+                    <a:pt x="2363543" y="780721"/>
+                  </a:lnTo>
+                  <a:lnTo>
+                    <a:pt x="2435165" y="798303"/>
+                  </a:lnTo>
+                  <a:lnTo>
+                    <a:pt x="2506788" y="815593"/>
+                  </a:lnTo>
+                  <a:lnTo>
+                    <a:pt x="2578410" y="832597"/>
+                  </a:lnTo>
+                  <a:lnTo>
+                    <a:pt x="2650033" y="849318"/>
+                  </a:lnTo>
+                  <a:lnTo>
+                    <a:pt x="2721655" y="865763"/>
+                  </a:lnTo>
+                  <a:lnTo>
+                    <a:pt x="2793278" y="881935"/>
+                  </a:lnTo>
+                  <a:lnTo>
+                    <a:pt x="2864901" y="897838"/>
+                  </a:lnTo>
+                  <a:lnTo>
+                    <a:pt x="2936523" y="913478"/>
+                  </a:lnTo>
+                  <a:lnTo>
+                    <a:pt x="3008146" y="928859"/>
+                  </a:lnTo>
+                  <a:lnTo>
+                    <a:pt x="3079768" y="943985"/>
+                  </a:lnTo>
+                  <a:lnTo>
+                    <a:pt x="3151391" y="958860"/>
+                  </a:lnTo>
+                  <a:lnTo>
+                    <a:pt x="3223013" y="973488"/>
+                  </a:lnTo>
+                  <a:lnTo>
+                    <a:pt x="3294636" y="987874"/>
+                  </a:lnTo>
+                  <a:lnTo>
+                    <a:pt x="3366258" y="1002021"/>
+                  </a:lnTo>
+                  <a:lnTo>
+                    <a:pt x="3437881" y="1015934"/>
+                  </a:lnTo>
+                  <a:lnTo>
+                    <a:pt x="3509503" y="1029616"/>
+                  </a:lnTo>
+                  <a:lnTo>
+                    <a:pt x="3581126" y="1043072"/>
+                  </a:lnTo>
+                  <a:lnTo>
+                    <a:pt x="3652748" y="1056304"/>
+                  </a:lnTo>
+                  <a:lnTo>
+                    <a:pt x="3724371" y="1069317"/>
+                  </a:lnTo>
+                  <a:lnTo>
+                    <a:pt x="3795993" y="1082114"/>
+                  </a:lnTo>
+                  <a:lnTo>
+                    <a:pt x="3867616" y="1094699"/>
+                  </a:lnTo>
+                  <a:lnTo>
+                    <a:pt x="3939238" y="1107075"/>
+                  </a:lnTo>
+                  <a:lnTo>
+                    <a:pt x="4010861" y="1119246"/>
+                  </a:lnTo>
+                  <a:lnTo>
+                    <a:pt x="4082483" y="1131215"/>
+                  </a:lnTo>
+                  <a:lnTo>
+                    <a:pt x="4154106" y="1142986"/>
+                  </a:lnTo>
+                  <a:lnTo>
+                    <a:pt x="4225729" y="1154562"/>
+                  </a:lnTo>
+                  <a:lnTo>
+                    <a:pt x="4297351" y="1165946"/>
+                  </a:lnTo>
+                  <a:lnTo>
+                    <a:pt x="4368974" y="1177141"/>
+                  </a:lnTo>
+                  <a:lnTo>
+                    <a:pt x="4440596" y="1188150"/>
+                  </a:lnTo>
+                  <a:lnTo>
+                    <a:pt x="4512219" y="1198977"/>
+                  </a:lnTo>
+                  <a:lnTo>
+                    <a:pt x="4583841" y="1209624"/>
+                  </a:lnTo>
+                  <a:lnTo>
+                    <a:pt x="4655464" y="1220095"/>
+                  </a:lnTo>
+                  <a:lnTo>
+                    <a:pt x="4727086" y="1230393"/>
+                  </a:lnTo>
+                  <a:lnTo>
+                    <a:pt x="4798709" y="1240519"/>
+                  </a:lnTo>
+                  <a:lnTo>
+                    <a:pt x="4870331" y="1250478"/>
+                  </a:lnTo>
+                  <a:lnTo>
+                    <a:pt x="4941954" y="1260271"/>
+                  </a:lnTo>
+                  <a:lnTo>
+                    <a:pt x="5013576" y="1269903"/>
+                  </a:lnTo>
+                  <a:lnTo>
+                    <a:pt x="5085199" y="1279374"/>
+                  </a:lnTo>
+                  <a:lnTo>
+                    <a:pt x="5156821" y="1288689"/>
+                  </a:lnTo>
+                  <a:lnTo>
+                    <a:pt x="5228444" y="1297849"/>
+                  </a:lnTo>
+                  <a:lnTo>
+                    <a:pt x="5300066" y="1306857"/>
+                  </a:lnTo>
+                  <a:lnTo>
+                    <a:pt x="5371689" y="1315716"/>
+                  </a:lnTo>
+                  <a:lnTo>
+                    <a:pt x="5443311" y="1324428"/>
+                  </a:lnTo>
+                  <a:lnTo>
+                    <a:pt x="5514934" y="1332995"/>
+                  </a:lnTo>
+                  <a:lnTo>
+                    <a:pt x="5586557" y="1341421"/>
+                  </a:lnTo>
+                  <a:lnTo>
+                    <a:pt x="5658179" y="1349707"/>
+                  </a:lnTo>
+                  <a:lnTo>
+                    <a:pt x="5729802" y="1357855"/>
+                  </a:lnTo>
+                  <a:lnTo>
+                    <a:pt x="5801424" y="1365868"/>
+                  </a:lnTo>
+                  <a:lnTo>
+                    <a:pt x="5873047" y="1373749"/>
+                  </a:lnTo>
+                  <a:lnTo>
+                    <a:pt x="5944669" y="1381499"/>
+                  </a:lnTo>
+                  <a:lnTo>
+                    <a:pt x="6016292" y="1389120"/>
+                  </a:lnTo>
+                  <a:lnTo>
+                    <a:pt x="6087914" y="1396615"/>
+                  </a:lnTo>
+                  <a:lnTo>
+                    <a:pt x="6159537" y="1403986"/>
+                  </a:lnTo>
+                  <a:lnTo>
+                    <a:pt x="6231159" y="1411234"/>
+                  </a:lnTo>
+                  <a:lnTo>
+                    <a:pt x="6302782" y="1418363"/>
+                  </a:lnTo>
+                  <a:lnTo>
+                    <a:pt x="6374404" y="1425373"/>
+                  </a:lnTo>
+                  <a:lnTo>
+                    <a:pt x="6446027" y="1432267"/>
+                  </a:lnTo>
+                  <a:lnTo>
+                    <a:pt x="6517649" y="1439047"/>
+                  </a:lnTo>
+                  <a:lnTo>
+                    <a:pt x="6589272" y="1445714"/>
+                  </a:lnTo>
+                  <a:lnTo>
+                    <a:pt x="6660894" y="1452270"/>
+                  </a:lnTo>
+                  <a:lnTo>
+                    <a:pt x="6732517" y="1458718"/>
+                  </a:lnTo>
+                  <a:lnTo>
+                    <a:pt x="6804139" y="1465060"/>
+                  </a:lnTo>
+                  <a:lnTo>
+                    <a:pt x="6875762" y="1471296"/>
+                  </a:lnTo>
+                  <a:lnTo>
+                    <a:pt x="6947385" y="1477428"/>
+                  </a:lnTo>
+                  <a:lnTo>
+                    <a:pt x="7019007" y="1483459"/>
+                  </a:lnTo>
+                  <a:lnTo>
+                    <a:pt x="7090630" y="1489390"/>
                   </a:lnTo>
                 </a:path>
               </a:pathLst>
@@ -5153,7 +5153,7 @@
                   <a:latin typeface="Helvetica"/>
                   <a:cs typeface="Helvetica"/>
                 </a:rPr>
-                <a:t>subHR per 10 % decline: 1.23 (1.14-1.32), p_Bonf = &lt;0.001 (n = 6)  |  per IQR decline (Δ = 29.3 %): 1.81 (1.46-2.25)  |  IQR: [-14.6, 14.7] %</a:t>
+                <a:t>subHR per 10 % decline: 1.22 (1.14-1.32), p_Bonf = &lt;0.001 (n = 6)  |  per IQR decline (Δ = 29.3 %): 1.80 (1.45-2.24)  |  IQR: [-14.6, 14.7] %</a:t>
               </a:r>
             </a:p>
           </p:txBody>
